--- a/img/TX.pptx
+++ b/img/TX.pptx
@@ -259,7 +259,7 @@
           <a:p>
             <a:fld id="{6BD44EFA-B01F-4EEC-BDEE-1E8697900FDD}" type="datetimeFigureOut">
               <a:rPr lang="en-US" smtClean="0"/>
-              <a:t>8/20/2025</a:t>
+              <a:t>3/20/2026</a:t>
             </a:fld>
             <a:endParaRPr lang="en-US"/>
           </a:p>
@@ -457,7 +457,7 @@
           <a:p>
             <a:fld id="{6BD44EFA-B01F-4EEC-BDEE-1E8697900FDD}" type="datetimeFigureOut">
               <a:rPr lang="en-US" smtClean="0"/>
-              <a:t>8/20/2025</a:t>
+              <a:t>3/20/2026</a:t>
             </a:fld>
             <a:endParaRPr lang="en-US"/>
           </a:p>
@@ -665,7 +665,7 @@
           <a:p>
             <a:fld id="{6BD44EFA-B01F-4EEC-BDEE-1E8697900FDD}" type="datetimeFigureOut">
               <a:rPr lang="en-US" smtClean="0"/>
-              <a:t>8/20/2025</a:t>
+              <a:t>3/20/2026</a:t>
             </a:fld>
             <a:endParaRPr lang="en-US"/>
           </a:p>
@@ -863,7 +863,7 @@
           <a:p>
             <a:fld id="{6BD44EFA-B01F-4EEC-BDEE-1E8697900FDD}" type="datetimeFigureOut">
               <a:rPr lang="en-US" smtClean="0"/>
-              <a:t>8/20/2025</a:t>
+              <a:t>3/20/2026</a:t>
             </a:fld>
             <a:endParaRPr lang="en-US"/>
           </a:p>
@@ -1138,7 +1138,7 @@
           <a:p>
             <a:fld id="{6BD44EFA-B01F-4EEC-BDEE-1E8697900FDD}" type="datetimeFigureOut">
               <a:rPr lang="en-US" smtClean="0"/>
-              <a:t>8/20/2025</a:t>
+              <a:t>3/20/2026</a:t>
             </a:fld>
             <a:endParaRPr lang="en-US"/>
           </a:p>
@@ -1403,7 +1403,7 @@
           <a:p>
             <a:fld id="{6BD44EFA-B01F-4EEC-BDEE-1E8697900FDD}" type="datetimeFigureOut">
               <a:rPr lang="en-US" smtClean="0"/>
-              <a:t>8/20/2025</a:t>
+              <a:t>3/20/2026</a:t>
             </a:fld>
             <a:endParaRPr lang="en-US"/>
           </a:p>
@@ -1815,7 +1815,7 @@
           <a:p>
             <a:fld id="{6BD44EFA-B01F-4EEC-BDEE-1E8697900FDD}" type="datetimeFigureOut">
               <a:rPr lang="en-US" smtClean="0"/>
-              <a:t>8/20/2025</a:t>
+              <a:t>3/20/2026</a:t>
             </a:fld>
             <a:endParaRPr lang="en-US"/>
           </a:p>
@@ -1956,7 +1956,7 @@
           <a:p>
             <a:fld id="{6BD44EFA-B01F-4EEC-BDEE-1E8697900FDD}" type="datetimeFigureOut">
               <a:rPr lang="en-US" smtClean="0"/>
-              <a:t>8/20/2025</a:t>
+              <a:t>3/20/2026</a:t>
             </a:fld>
             <a:endParaRPr lang="en-US"/>
           </a:p>
@@ -2069,7 +2069,7 @@
           <a:p>
             <a:fld id="{6BD44EFA-B01F-4EEC-BDEE-1E8697900FDD}" type="datetimeFigureOut">
               <a:rPr lang="en-US" smtClean="0"/>
-              <a:t>8/20/2025</a:t>
+              <a:t>3/20/2026</a:t>
             </a:fld>
             <a:endParaRPr lang="en-US"/>
           </a:p>
@@ -2380,7 +2380,7 @@
           <a:p>
             <a:fld id="{6BD44EFA-B01F-4EEC-BDEE-1E8697900FDD}" type="datetimeFigureOut">
               <a:rPr lang="en-US" smtClean="0"/>
-              <a:t>8/20/2025</a:t>
+              <a:t>3/20/2026</a:t>
             </a:fld>
             <a:endParaRPr lang="en-US"/>
           </a:p>
@@ -2668,7 +2668,7 @@
           <a:p>
             <a:fld id="{6BD44EFA-B01F-4EEC-BDEE-1E8697900FDD}" type="datetimeFigureOut">
               <a:rPr lang="en-US" smtClean="0"/>
-              <a:t>8/20/2025</a:t>
+              <a:t>3/20/2026</a:t>
             </a:fld>
             <a:endParaRPr lang="en-US"/>
           </a:p>
@@ -2909,7 +2909,7 @@
           <a:p>
             <a:fld id="{6BD44EFA-B01F-4EEC-BDEE-1E8697900FDD}" type="datetimeFigureOut">
               <a:rPr lang="en-US" smtClean="0"/>
-              <a:t>8/20/2025</a:t>
+              <a:t>3/20/2026</a:t>
             </a:fld>
             <a:endParaRPr lang="en-US"/>
           </a:p>
@@ -3334,10 +3334,10 @@
       </p:grpSpPr>
       <p:sp>
         <p:nvSpPr>
-          <p:cNvPr id="4" name="Rectangle: Rounded Corners 3">
-            <a:extLst>
-              <a:ext uri="{FF2B5EF4-FFF2-40B4-BE49-F238E27FC236}">
-                <a16:creationId xmlns:a16="http://schemas.microsoft.com/office/drawing/2014/main" id="{D77F7598-6833-EFA4-1680-EA357E7D416C}"/>
+          <p:cNvPr id="20" name="Rectangle: Rounded Corners 19">
+            <a:extLst>
+              <a:ext uri="{FF2B5EF4-FFF2-40B4-BE49-F238E27FC236}">
+                <a16:creationId xmlns:a16="http://schemas.microsoft.com/office/drawing/2014/main" id="{6D5B386B-9274-C7DE-2DED-F7ECDEAB5F22}"/>
               </a:ext>
             </a:extLst>
           </p:cNvPr>
@@ -3346,7 +3346,7 @@
         </p:nvSpPr>
         <p:spPr>
           <a:xfrm>
-            <a:off x="334030" y="2281139"/>
+            <a:off x="460104" y="5386622"/>
             <a:ext cx="1585519" cy="771787"/>
           </a:xfrm>
           <a:prstGeom prst="roundRect">
@@ -3376,18 +3376,105 @@
             <a:pPr algn="ctr"/>
             <a:r>
               <a:rPr lang="es-CL" dirty="0"/>
-              <a:t>micrófono</a:t>
+              <a:t>batería</a:t>
             </a:r>
             <a:endParaRPr lang="en-US" dirty="0"/>
           </a:p>
         </p:txBody>
       </p:sp>
-      <p:sp>
-        <p:nvSpPr>
-          <p:cNvPr id="5" name="Rectangle: Rounded Corners 4">
-            <a:extLst>
-              <a:ext uri="{FF2B5EF4-FFF2-40B4-BE49-F238E27FC236}">
-                <a16:creationId xmlns:a16="http://schemas.microsoft.com/office/drawing/2014/main" id="{872CD837-96F8-6E12-3DC4-2389E2172D4A}"/>
+      <p:cxnSp>
+        <p:nvCxnSpPr>
+          <p:cNvPr id="52" name="Straight Arrow Connector 51">
+            <a:extLst>
+              <a:ext uri="{FF2B5EF4-FFF2-40B4-BE49-F238E27FC236}">
+                <a16:creationId xmlns:a16="http://schemas.microsoft.com/office/drawing/2014/main" id="{33887707-1F88-71EB-8350-C1BA9C7FF998}"/>
+              </a:ext>
+            </a:extLst>
+          </p:cNvPr>
+          <p:cNvCxnSpPr>
+            <a:cxnSpLocks/>
+            <a:stCxn id="20" idx="3"/>
+          </p:cNvCxnSpPr>
+          <p:nvPr/>
+        </p:nvCxnSpPr>
+        <p:spPr>
+          <a:xfrm flipV="1">
+            <a:off x="2045623" y="5772515"/>
+            <a:ext cx="437027" cy="1"/>
+          </a:xfrm>
+          <a:prstGeom prst="straightConnector1">
+            <a:avLst/>
+          </a:prstGeom>
+          <a:ln>
+            <a:tailEnd type="triangle"/>
+          </a:ln>
+        </p:spPr>
+        <p:style>
+          <a:lnRef idx="1">
+            <a:schemeClr val="accent1"/>
+          </a:lnRef>
+          <a:fillRef idx="0">
+            <a:schemeClr val="accent1"/>
+          </a:fillRef>
+          <a:effectRef idx="0">
+            <a:schemeClr val="accent1"/>
+          </a:effectRef>
+          <a:fontRef idx="minor">
+            <a:schemeClr val="tx1"/>
+          </a:fontRef>
+        </p:style>
+      </p:cxnSp>
+      <p:cxnSp>
+        <p:nvCxnSpPr>
+          <p:cNvPr id="108" name="Straight Connector 107">
+            <a:extLst>
+              <a:ext uri="{FF2B5EF4-FFF2-40B4-BE49-F238E27FC236}">
+                <a16:creationId xmlns:a16="http://schemas.microsoft.com/office/drawing/2014/main" id="{BCE83E19-7A96-ECA5-FBD8-2A07BAFA416E}"/>
+              </a:ext>
+            </a:extLst>
+          </p:cNvPr>
+          <p:cNvCxnSpPr/>
+          <p:nvPr/>
+        </p:nvCxnSpPr>
+        <p:spPr>
+          <a:xfrm>
+            <a:off x="0" y="4953477"/>
+            <a:ext cx="11970328" cy="0"/>
+          </a:xfrm>
+          <a:prstGeom prst="line">
+            <a:avLst/>
+          </a:prstGeom>
+          <a:ln w="19050" cap="flat" cmpd="sng" algn="ctr">
+            <a:solidFill>
+              <a:schemeClr val="dk1"/>
+            </a:solidFill>
+            <a:prstDash val="dash"/>
+            <a:round/>
+            <a:headEnd type="none" w="med" len="med"/>
+            <a:tailEnd type="none" w="med" len="med"/>
+          </a:ln>
+        </p:spPr>
+        <p:style>
+          <a:lnRef idx="0">
+            <a:scrgbClr r="0" g="0" b="0"/>
+          </a:lnRef>
+          <a:fillRef idx="0">
+            <a:scrgbClr r="0" g="0" b="0"/>
+          </a:fillRef>
+          <a:effectRef idx="0">
+            <a:scrgbClr r="0" g="0" b="0"/>
+          </a:effectRef>
+          <a:fontRef idx="minor">
+            <a:schemeClr val="tx1"/>
+          </a:fontRef>
+        </p:style>
+      </p:cxnSp>
+      <p:sp>
+        <p:nvSpPr>
+          <p:cNvPr id="3" name="Rectangle: Rounded Corners 2">
+            <a:extLst>
+              <a:ext uri="{FF2B5EF4-FFF2-40B4-BE49-F238E27FC236}">
+                <a16:creationId xmlns:a16="http://schemas.microsoft.com/office/drawing/2014/main" id="{FDBF19EE-D13B-B1BE-05C3-375C15C0CBD7}"/>
               </a:ext>
             </a:extLst>
           </p:cNvPr>
@@ -3396,7 +3483,1079 @@
         </p:nvSpPr>
         <p:spPr>
           <a:xfrm>
-            <a:off x="1663009" y="2139222"/>
+            <a:off x="2482650" y="5386622"/>
+            <a:ext cx="1585519" cy="771787"/>
+          </a:xfrm>
+          <a:prstGeom prst="roundRect">
+            <a:avLst/>
+          </a:prstGeom>
+        </p:spPr>
+        <p:style>
+          <a:lnRef idx="2">
+            <a:schemeClr val="accent1">
+              <a:shade val="15000"/>
+            </a:schemeClr>
+          </a:lnRef>
+          <a:fillRef idx="1">
+            <a:schemeClr val="accent1"/>
+          </a:fillRef>
+          <a:effectRef idx="0">
+            <a:schemeClr val="accent1"/>
+          </a:effectRef>
+          <a:fontRef idx="minor">
+            <a:schemeClr val="lt1"/>
+          </a:fontRef>
+        </p:style>
+        <p:txBody>
+          <a:bodyPr rtlCol="0" anchor="ctr"/>
+          <a:lstStyle/>
+          <a:p>
+            <a:pPr algn="ctr"/>
+            <a:r>
+              <a:rPr lang="es-CL" dirty="0"/>
+              <a:t>Regulador de Voltaje</a:t>
+            </a:r>
+            <a:endParaRPr lang="en-US" dirty="0"/>
+          </a:p>
+        </p:txBody>
+      </p:sp>
+      <p:sp>
+        <p:nvSpPr>
+          <p:cNvPr id="13" name="Rectangle: Rounded Corners 12">
+            <a:extLst>
+              <a:ext uri="{FF2B5EF4-FFF2-40B4-BE49-F238E27FC236}">
+                <a16:creationId xmlns:a16="http://schemas.microsoft.com/office/drawing/2014/main" id="{4EC17DD5-C58D-C2B5-5003-C3C5CAE90CFA}"/>
+              </a:ext>
+            </a:extLst>
+          </p:cNvPr>
+          <p:cNvSpPr/>
+          <p:nvPr/>
+        </p:nvSpPr>
+        <p:spPr>
+          <a:xfrm>
+            <a:off x="4505196" y="5386622"/>
+            <a:ext cx="1585519" cy="771787"/>
+          </a:xfrm>
+          <a:prstGeom prst="roundRect">
+            <a:avLst/>
+          </a:prstGeom>
+        </p:spPr>
+        <p:style>
+          <a:lnRef idx="2">
+            <a:schemeClr val="accent1">
+              <a:shade val="15000"/>
+            </a:schemeClr>
+          </a:lnRef>
+          <a:fillRef idx="1">
+            <a:schemeClr val="accent1"/>
+          </a:fillRef>
+          <a:effectRef idx="0">
+            <a:schemeClr val="accent1"/>
+          </a:effectRef>
+          <a:fontRef idx="minor">
+            <a:schemeClr val="lt1"/>
+          </a:fontRef>
+        </p:style>
+        <p:txBody>
+          <a:bodyPr rtlCol="0" anchor="ctr"/>
+          <a:lstStyle/>
+          <a:p>
+            <a:pPr algn="ctr"/>
+            <a:r>
+              <a:rPr lang="es-CL" dirty="0"/>
+              <a:t>Tierra Virtual</a:t>
+            </a:r>
+            <a:endParaRPr lang="en-US" dirty="0"/>
+          </a:p>
+        </p:txBody>
+      </p:sp>
+      <p:cxnSp>
+        <p:nvCxnSpPr>
+          <p:cNvPr id="15" name="Straight Arrow Connector 14">
+            <a:extLst>
+              <a:ext uri="{FF2B5EF4-FFF2-40B4-BE49-F238E27FC236}">
+                <a16:creationId xmlns:a16="http://schemas.microsoft.com/office/drawing/2014/main" id="{64D7AB2C-D626-DF35-E6B5-3CBF2FAFCC91}"/>
+              </a:ext>
+            </a:extLst>
+          </p:cNvPr>
+          <p:cNvCxnSpPr>
+            <a:cxnSpLocks/>
+            <a:stCxn id="3" idx="3"/>
+            <a:endCxn id="13" idx="1"/>
+          </p:cNvCxnSpPr>
+          <p:nvPr/>
+        </p:nvCxnSpPr>
+        <p:spPr>
+          <a:xfrm>
+            <a:off x="4068169" y="5772516"/>
+            <a:ext cx="437027" cy="0"/>
+          </a:xfrm>
+          <a:prstGeom prst="straightConnector1">
+            <a:avLst/>
+          </a:prstGeom>
+          <a:ln>
+            <a:tailEnd type="triangle"/>
+          </a:ln>
+        </p:spPr>
+        <p:style>
+          <a:lnRef idx="1">
+            <a:schemeClr val="accent1"/>
+          </a:lnRef>
+          <a:fillRef idx="0">
+            <a:schemeClr val="accent1"/>
+          </a:fillRef>
+          <a:effectRef idx="0">
+            <a:schemeClr val="accent1"/>
+          </a:effectRef>
+          <a:fontRef idx="minor">
+            <a:schemeClr val="tx1"/>
+          </a:fontRef>
+        </p:style>
+      </p:cxnSp>
+      <p:sp>
+        <p:nvSpPr>
+          <p:cNvPr id="21" name="TextBox 20">
+            <a:extLst>
+              <a:ext uri="{FF2B5EF4-FFF2-40B4-BE49-F238E27FC236}">
+                <a16:creationId xmlns:a16="http://schemas.microsoft.com/office/drawing/2014/main" id="{EA507F50-4215-C26F-6734-CB40DE60DC7D}"/>
+              </a:ext>
+            </a:extLst>
+          </p:cNvPr>
+          <p:cNvSpPr txBox="1"/>
+          <p:nvPr/>
+        </p:nvSpPr>
+        <p:spPr>
+          <a:xfrm>
+            <a:off x="6816599" y="5571748"/>
+            <a:ext cx="4369050" cy="369332"/>
+          </a:xfrm>
+          <a:prstGeom prst="rect">
+            <a:avLst/>
+          </a:prstGeom>
+          <a:noFill/>
+        </p:spPr>
+        <p:txBody>
+          <a:bodyPr wrap="square" rtlCol="0">
+            <a:spAutoFit/>
+          </a:bodyPr>
+          <a:lstStyle/>
+          <a:p>
+            <a:r>
+              <a:rPr lang="es-CL" dirty="0"/>
+              <a:t>Placa 3: Fuente de Poder</a:t>
+            </a:r>
+            <a:endParaRPr lang="en-US" dirty="0"/>
+          </a:p>
+        </p:txBody>
+      </p:sp>
+      <p:sp>
+        <p:nvSpPr>
+          <p:cNvPr id="35" name="Rectangle: Rounded Corners 34">
+            <a:extLst>
+              <a:ext uri="{FF2B5EF4-FFF2-40B4-BE49-F238E27FC236}">
+                <a16:creationId xmlns:a16="http://schemas.microsoft.com/office/drawing/2014/main" id="{0A5E6DB4-FC1F-4875-19AA-8454C94557E3}"/>
+              </a:ext>
+            </a:extLst>
+          </p:cNvPr>
+          <p:cNvSpPr/>
+          <p:nvPr/>
+        </p:nvSpPr>
+        <p:spPr>
+          <a:xfrm>
+            <a:off x="3867531" y="5252707"/>
+            <a:ext cx="401275" cy="283833"/>
+          </a:xfrm>
+          <a:prstGeom prst="roundRect">
+            <a:avLst/>
+          </a:prstGeom>
+          <a:solidFill>
+            <a:schemeClr val="bg1"/>
+          </a:solidFill>
+        </p:spPr>
+        <p:style>
+          <a:lnRef idx="2">
+            <a:schemeClr val="accent2">
+              <a:shade val="15000"/>
+            </a:schemeClr>
+          </a:lnRef>
+          <a:fillRef idx="1">
+            <a:schemeClr val="accent2"/>
+          </a:fillRef>
+          <a:effectRef idx="0">
+            <a:schemeClr val="accent2"/>
+          </a:effectRef>
+          <a:fontRef idx="minor">
+            <a:schemeClr val="lt1"/>
+          </a:fontRef>
+        </p:style>
+        <p:txBody>
+          <a:bodyPr rtlCol="0" anchor="ctr"/>
+          <a:lstStyle/>
+          <a:p>
+            <a:pPr algn="ctr"/>
+            <a:r>
+              <a:rPr lang="es-CL" sz="1400" dirty="0">
+                <a:solidFill>
+                  <a:schemeClr val="tx1"/>
+                </a:solidFill>
+              </a:rPr>
+              <a:t>T8</a:t>
+            </a:r>
+            <a:endParaRPr lang="en-US" sz="1400" dirty="0">
+              <a:solidFill>
+                <a:schemeClr val="tx1"/>
+              </a:solidFill>
+            </a:endParaRPr>
+          </a:p>
+        </p:txBody>
+      </p:sp>
+      <p:sp>
+        <p:nvSpPr>
+          <p:cNvPr id="23" name="Rectangle: Rounded Corners 22">
+            <a:extLst>
+              <a:ext uri="{FF2B5EF4-FFF2-40B4-BE49-F238E27FC236}">
+                <a16:creationId xmlns:a16="http://schemas.microsoft.com/office/drawing/2014/main" id="{2FF62A52-1D62-059D-4312-3D38DBE91EE1}"/>
+              </a:ext>
+            </a:extLst>
+          </p:cNvPr>
+          <p:cNvSpPr/>
+          <p:nvPr/>
+        </p:nvSpPr>
+        <p:spPr>
+          <a:xfrm>
+            <a:off x="5890076" y="5239741"/>
+            <a:ext cx="401275" cy="283833"/>
+          </a:xfrm>
+          <a:prstGeom prst="roundRect">
+            <a:avLst/>
+          </a:prstGeom>
+          <a:solidFill>
+            <a:schemeClr val="bg1"/>
+          </a:solidFill>
+        </p:spPr>
+        <p:style>
+          <a:lnRef idx="2">
+            <a:schemeClr val="accent2">
+              <a:shade val="15000"/>
+            </a:schemeClr>
+          </a:lnRef>
+          <a:fillRef idx="1">
+            <a:schemeClr val="accent2"/>
+          </a:fillRef>
+          <a:effectRef idx="0">
+            <a:schemeClr val="accent2"/>
+          </a:effectRef>
+          <a:fontRef idx="minor">
+            <a:schemeClr val="lt1"/>
+          </a:fontRef>
+        </p:style>
+        <p:txBody>
+          <a:bodyPr rtlCol="0" anchor="ctr"/>
+          <a:lstStyle/>
+          <a:p>
+            <a:pPr algn="ctr"/>
+            <a:r>
+              <a:rPr lang="es-CL" sz="1400" dirty="0">
+                <a:solidFill>
+                  <a:schemeClr val="tx1"/>
+                </a:solidFill>
+              </a:rPr>
+              <a:t>T8</a:t>
+            </a:r>
+            <a:endParaRPr lang="en-US" sz="1400" dirty="0">
+              <a:solidFill>
+                <a:schemeClr val="tx1"/>
+              </a:solidFill>
+            </a:endParaRPr>
+          </a:p>
+        </p:txBody>
+      </p:sp>
+      <p:sp>
+        <p:nvSpPr>
+          <p:cNvPr id="34" name="Rectangle: Rounded Corners 33">
+            <a:extLst>
+              <a:ext uri="{FF2B5EF4-FFF2-40B4-BE49-F238E27FC236}">
+                <a16:creationId xmlns:a16="http://schemas.microsoft.com/office/drawing/2014/main" id="{A6A12FDA-81FD-E402-6FD0-30D0B6038439}"/>
+              </a:ext>
+            </a:extLst>
+          </p:cNvPr>
+          <p:cNvSpPr/>
+          <p:nvPr/>
+        </p:nvSpPr>
+        <p:spPr>
+          <a:xfrm>
+            <a:off x="5595119" y="3257658"/>
+            <a:ext cx="1585519" cy="771787"/>
+          </a:xfrm>
+          <a:prstGeom prst="roundRect">
+            <a:avLst/>
+          </a:prstGeom>
+        </p:spPr>
+        <p:style>
+          <a:lnRef idx="2">
+            <a:schemeClr val="accent1">
+              <a:shade val="15000"/>
+            </a:schemeClr>
+          </a:lnRef>
+          <a:fillRef idx="1">
+            <a:schemeClr val="accent1"/>
+          </a:fillRef>
+          <a:effectRef idx="0">
+            <a:schemeClr val="accent1"/>
+          </a:effectRef>
+          <a:fontRef idx="minor">
+            <a:schemeClr val="lt1"/>
+          </a:fontRef>
+        </p:style>
+        <p:txBody>
+          <a:bodyPr rtlCol="0" anchor="ctr"/>
+          <a:lstStyle/>
+          <a:p>
+            <a:pPr algn="ctr"/>
+            <a:r>
+              <a:rPr lang="es-CL" dirty="0"/>
+              <a:t>Amplificador de diferencias</a:t>
+            </a:r>
+            <a:endParaRPr lang="en-US" dirty="0"/>
+          </a:p>
+        </p:txBody>
+      </p:sp>
+      <p:sp>
+        <p:nvSpPr>
+          <p:cNvPr id="37" name="Rectangle: Rounded Corners 36">
+            <a:extLst>
+              <a:ext uri="{FF2B5EF4-FFF2-40B4-BE49-F238E27FC236}">
+                <a16:creationId xmlns:a16="http://schemas.microsoft.com/office/drawing/2014/main" id="{9692FF96-B2A6-5E35-A93B-BBC66F1A5DEC}"/>
+              </a:ext>
+            </a:extLst>
+          </p:cNvPr>
+          <p:cNvSpPr/>
+          <p:nvPr/>
+        </p:nvSpPr>
+        <p:spPr>
+          <a:xfrm>
+            <a:off x="10406231" y="916920"/>
+            <a:ext cx="926206" cy="771787"/>
+          </a:xfrm>
+          <a:prstGeom prst="roundRect">
+            <a:avLst/>
+          </a:prstGeom>
+        </p:spPr>
+        <p:style>
+          <a:lnRef idx="2">
+            <a:schemeClr val="accent1">
+              <a:shade val="15000"/>
+            </a:schemeClr>
+          </a:lnRef>
+          <a:fillRef idx="1">
+            <a:schemeClr val="accent1"/>
+          </a:fillRef>
+          <a:effectRef idx="0">
+            <a:schemeClr val="accent1"/>
+          </a:effectRef>
+          <a:fontRef idx="minor">
+            <a:schemeClr val="lt1"/>
+          </a:fontRef>
+        </p:style>
+        <p:txBody>
+          <a:bodyPr rtlCol="0" anchor="ctr"/>
+          <a:lstStyle/>
+          <a:p>
+            <a:pPr algn="ctr"/>
+            <a:r>
+              <a:rPr lang="es-CL" dirty="0"/>
+              <a:t>LED</a:t>
+            </a:r>
+            <a:endParaRPr lang="en-US" dirty="0"/>
+          </a:p>
+        </p:txBody>
+      </p:sp>
+      <p:sp>
+        <p:nvSpPr>
+          <p:cNvPr id="38" name="Rectangle: Rounded Corners 37">
+            <a:extLst>
+              <a:ext uri="{FF2B5EF4-FFF2-40B4-BE49-F238E27FC236}">
+                <a16:creationId xmlns:a16="http://schemas.microsoft.com/office/drawing/2014/main" id="{3F892F5E-F6EE-DB64-F283-5EC9122F85B9}"/>
+              </a:ext>
+            </a:extLst>
+          </p:cNvPr>
+          <p:cNvSpPr/>
+          <p:nvPr/>
+        </p:nvSpPr>
+        <p:spPr>
+          <a:xfrm>
+            <a:off x="10406231" y="1699565"/>
+            <a:ext cx="926206" cy="771787"/>
+          </a:xfrm>
+          <a:prstGeom prst="roundRect">
+            <a:avLst/>
+          </a:prstGeom>
+        </p:spPr>
+        <p:style>
+          <a:lnRef idx="2">
+            <a:schemeClr val="accent1">
+              <a:shade val="15000"/>
+            </a:schemeClr>
+          </a:lnRef>
+          <a:fillRef idx="1">
+            <a:schemeClr val="accent1"/>
+          </a:fillRef>
+          <a:effectRef idx="0">
+            <a:schemeClr val="accent1"/>
+          </a:effectRef>
+          <a:fontRef idx="minor">
+            <a:schemeClr val="lt1"/>
+          </a:fontRef>
+        </p:style>
+        <p:txBody>
+          <a:bodyPr rtlCol="0" anchor="ctr"/>
+          <a:lstStyle/>
+          <a:p>
+            <a:pPr algn="ctr"/>
+            <a:r>
+              <a:rPr lang="es-CL" dirty="0"/>
+              <a:t>LED driver</a:t>
+            </a:r>
+            <a:endParaRPr lang="en-US" dirty="0"/>
+          </a:p>
+        </p:txBody>
+      </p:sp>
+      <p:sp>
+        <p:nvSpPr>
+          <p:cNvPr id="41" name="Rectangle: Rounded Corners 40">
+            <a:extLst>
+              <a:ext uri="{FF2B5EF4-FFF2-40B4-BE49-F238E27FC236}">
+                <a16:creationId xmlns:a16="http://schemas.microsoft.com/office/drawing/2014/main" id="{1AC1C7A6-61B5-AFAE-C68F-72DAA0715543}"/>
+              </a:ext>
+            </a:extLst>
+          </p:cNvPr>
+          <p:cNvSpPr/>
+          <p:nvPr/>
+        </p:nvSpPr>
+        <p:spPr>
+          <a:xfrm>
+            <a:off x="7870527" y="3254448"/>
+            <a:ext cx="3839213" cy="771787"/>
+          </a:xfrm>
+          <a:prstGeom prst="roundRect">
+            <a:avLst/>
+          </a:prstGeom>
+        </p:spPr>
+        <p:style>
+          <a:lnRef idx="2">
+            <a:schemeClr val="accent1">
+              <a:shade val="15000"/>
+            </a:schemeClr>
+          </a:lnRef>
+          <a:fillRef idx="1">
+            <a:schemeClr val="accent1"/>
+          </a:fillRef>
+          <a:effectRef idx="0">
+            <a:schemeClr val="accent1"/>
+          </a:effectRef>
+          <a:fontRef idx="minor">
+            <a:schemeClr val="lt1"/>
+          </a:fontRef>
+        </p:style>
+        <p:txBody>
+          <a:bodyPr rtlCol="0" anchor="ctr"/>
+          <a:lstStyle/>
+          <a:p>
+            <a:pPr algn="ctr"/>
+            <a:r>
+              <a:rPr lang="es-CL" dirty="0" err="1"/>
+              <a:t>Diode</a:t>
+            </a:r>
+            <a:r>
+              <a:rPr lang="es-CL" dirty="0"/>
+              <a:t> Ladder</a:t>
+            </a:r>
+            <a:endParaRPr lang="en-US" dirty="0"/>
+          </a:p>
+        </p:txBody>
+      </p:sp>
+      <p:cxnSp>
+        <p:nvCxnSpPr>
+          <p:cNvPr id="42" name="Straight Arrow Connector 41">
+            <a:extLst>
+              <a:ext uri="{FF2B5EF4-FFF2-40B4-BE49-F238E27FC236}">
+                <a16:creationId xmlns:a16="http://schemas.microsoft.com/office/drawing/2014/main" id="{31CC6A14-C0FF-4093-5293-9914F81E2331}"/>
+              </a:ext>
+            </a:extLst>
+          </p:cNvPr>
+          <p:cNvCxnSpPr>
+            <a:cxnSpLocks/>
+            <a:stCxn id="34" idx="3"/>
+            <a:endCxn id="41" idx="1"/>
+          </p:cNvCxnSpPr>
+          <p:nvPr/>
+        </p:nvCxnSpPr>
+        <p:spPr>
+          <a:xfrm flipV="1">
+            <a:off x="7180638" y="3640342"/>
+            <a:ext cx="689889" cy="3210"/>
+          </a:xfrm>
+          <a:prstGeom prst="straightConnector1">
+            <a:avLst/>
+          </a:prstGeom>
+          <a:ln>
+            <a:tailEnd type="triangle"/>
+          </a:ln>
+        </p:spPr>
+        <p:style>
+          <a:lnRef idx="1">
+            <a:schemeClr val="accent1"/>
+          </a:lnRef>
+          <a:fillRef idx="0">
+            <a:schemeClr val="accent1"/>
+          </a:fillRef>
+          <a:effectRef idx="0">
+            <a:schemeClr val="accent1"/>
+          </a:effectRef>
+          <a:fontRef idx="minor">
+            <a:schemeClr val="tx1"/>
+          </a:fontRef>
+        </p:style>
+      </p:cxnSp>
+      <p:sp>
+        <p:nvSpPr>
+          <p:cNvPr id="51" name="Rectangle: Rounded Corners 50">
+            <a:extLst>
+              <a:ext uri="{FF2B5EF4-FFF2-40B4-BE49-F238E27FC236}">
+                <a16:creationId xmlns:a16="http://schemas.microsoft.com/office/drawing/2014/main" id="{06F233E6-1BB4-A82F-16CD-2A916E9D9ADD}"/>
+              </a:ext>
+            </a:extLst>
+          </p:cNvPr>
+          <p:cNvSpPr/>
+          <p:nvPr/>
+        </p:nvSpPr>
+        <p:spPr>
+          <a:xfrm>
+            <a:off x="9783598" y="1063801"/>
+            <a:ext cx="926206" cy="771787"/>
+          </a:xfrm>
+          <a:prstGeom prst="roundRect">
+            <a:avLst/>
+          </a:prstGeom>
+        </p:spPr>
+        <p:style>
+          <a:lnRef idx="2">
+            <a:schemeClr val="accent1">
+              <a:shade val="15000"/>
+            </a:schemeClr>
+          </a:lnRef>
+          <a:fillRef idx="1">
+            <a:schemeClr val="accent1"/>
+          </a:fillRef>
+          <a:effectRef idx="0">
+            <a:schemeClr val="accent1"/>
+          </a:effectRef>
+          <a:fontRef idx="minor">
+            <a:schemeClr val="lt1"/>
+          </a:fontRef>
+        </p:style>
+        <p:txBody>
+          <a:bodyPr rtlCol="0" anchor="ctr"/>
+          <a:lstStyle/>
+          <a:p>
+            <a:pPr algn="ctr"/>
+            <a:r>
+              <a:rPr lang="es-CL" dirty="0"/>
+              <a:t>LED</a:t>
+            </a:r>
+            <a:endParaRPr lang="en-US" dirty="0"/>
+          </a:p>
+        </p:txBody>
+      </p:sp>
+      <p:sp>
+        <p:nvSpPr>
+          <p:cNvPr id="53" name="Rectangle: Rounded Corners 52">
+            <a:extLst>
+              <a:ext uri="{FF2B5EF4-FFF2-40B4-BE49-F238E27FC236}">
+                <a16:creationId xmlns:a16="http://schemas.microsoft.com/office/drawing/2014/main" id="{68AD4A16-E5C1-AEFF-5AE0-B2DFBDFFCA91}"/>
+              </a:ext>
+            </a:extLst>
+          </p:cNvPr>
+          <p:cNvSpPr/>
+          <p:nvPr/>
+        </p:nvSpPr>
+        <p:spPr>
+          <a:xfrm>
+            <a:off x="9783598" y="1846446"/>
+            <a:ext cx="926206" cy="771787"/>
+          </a:xfrm>
+          <a:prstGeom prst="roundRect">
+            <a:avLst/>
+          </a:prstGeom>
+        </p:spPr>
+        <p:style>
+          <a:lnRef idx="2">
+            <a:schemeClr val="accent1">
+              <a:shade val="15000"/>
+            </a:schemeClr>
+          </a:lnRef>
+          <a:fillRef idx="1">
+            <a:schemeClr val="accent1"/>
+          </a:fillRef>
+          <a:effectRef idx="0">
+            <a:schemeClr val="accent1"/>
+          </a:effectRef>
+          <a:fontRef idx="minor">
+            <a:schemeClr val="lt1"/>
+          </a:fontRef>
+        </p:style>
+        <p:txBody>
+          <a:bodyPr rtlCol="0" anchor="ctr"/>
+          <a:lstStyle/>
+          <a:p>
+            <a:pPr algn="ctr"/>
+            <a:r>
+              <a:rPr lang="es-CL" dirty="0"/>
+              <a:t>LED driver</a:t>
+            </a:r>
+            <a:endParaRPr lang="en-US" dirty="0"/>
+          </a:p>
+        </p:txBody>
+      </p:sp>
+      <p:sp>
+        <p:nvSpPr>
+          <p:cNvPr id="55" name="Rectangle: Rounded Corners 54">
+            <a:extLst>
+              <a:ext uri="{FF2B5EF4-FFF2-40B4-BE49-F238E27FC236}">
+                <a16:creationId xmlns:a16="http://schemas.microsoft.com/office/drawing/2014/main" id="{46DE0A67-3534-10E8-B264-80B8D9C306B8}"/>
+              </a:ext>
+            </a:extLst>
+          </p:cNvPr>
+          <p:cNvSpPr/>
+          <p:nvPr/>
+        </p:nvSpPr>
+        <p:spPr>
+          <a:xfrm>
+            <a:off x="9320495" y="1259701"/>
+            <a:ext cx="926206" cy="771787"/>
+          </a:xfrm>
+          <a:prstGeom prst="roundRect">
+            <a:avLst/>
+          </a:prstGeom>
+        </p:spPr>
+        <p:style>
+          <a:lnRef idx="2">
+            <a:schemeClr val="accent1">
+              <a:shade val="15000"/>
+            </a:schemeClr>
+          </a:lnRef>
+          <a:fillRef idx="1">
+            <a:schemeClr val="accent1"/>
+          </a:fillRef>
+          <a:effectRef idx="0">
+            <a:schemeClr val="accent1"/>
+          </a:effectRef>
+          <a:fontRef idx="minor">
+            <a:schemeClr val="lt1"/>
+          </a:fontRef>
+        </p:style>
+        <p:txBody>
+          <a:bodyPr rtlCol="0" anchor="ctr"/>
+          <a:lstStyle/>
+          <a:p>
+            <a:pPr algn="ctr"/>
+            <a:r>
+              <a:rPr lang="es-CL" dirty="0"/>
+              <a:t>LED</a:t>
+            </a:r>
+            <a:endParaRPr lang="en-US" dirty="0"/>
+          </a:p>
+        </p:txBody>
+      </p:sp>
+      <p:sp>
+        <p:nvSpPr>
+          <p:cNvPr id="56" name="Rectangle: Rounded Corners 55">
+            <a:extLst>
+              <a:ext uri="{FF2B5EF4-FFF2-40B4-BE49-F238E27FC236}">
+                <a16:creationId xmlns:a16="http://schemas.microsoft.com/office/drawing/2014/main" id="{3CA286F8-2E1F-785E-9C5F-ECE52E6B17D4}"/>
+              </a:ext>
+            </a:extLst>
+          </p:cNvPr>
+          <p:cNvSpPr/>
+          <p:nvPr/>
+        </p:nvSpPr>
+        <p:spPr>
+          <a:xfrm>
+            <a:off x="9320495" y="2042346"/>
+            <a:ext cx="926206" cy="771787"/>
+          </a:xfrm>
+          <a:prstGeom prst="roundRect">
+            <a:avLst/>
+          </a:prstGeom>
+        </p:spPr>
+        <p:style>
+          <a:lnRef idx="2">
+            <a:schemeClr val="accent1">
+              <a:shade val="15000"/>
+            </a:schemeClr>
+          </a:lnRef>
+          <a:fillRef idx="1">
+            <a:schemeClr val="accent1"/>
+          </a:fillRef>
+          <a:effectRef idx="0">
+            <a:schemeClr val="accent1"/>
+          </a:effectRef>
+          <a:fontRef idx="minor">
+            <a:schemeClr val="lt1"/>
+          </a:fontRef>
+        </p:style>
+        <p:txBody>
+          <a:bodyPr rtlCol="0" anchor="ctr"/>
+          <a:lstStyle/>
+          <a:p>
+            <a:pPr algn="ctr"/>
+            <a:r>
+              <a:rPr lang="es-CL" dirty="0"/>
+              <a:t>LED driver</a:t>
+            </a:r>
+            <a:endParaRPr lang="en-US" dirty="0"/>
+          </a:p>
+        </p:txBody>
+      </p:sp>
+      <p:sp>
+        <p:nvSpPr>
+          <p:cNvPr id="57" name="Rectangle: Rounded Corners 56">
+            <a:extLst>
+              <a:ext uri="{FF2B5EF4-FFF2-40B4-BE49-F238E27FC236}">
+                <a16:creationId xmlns:a16="http://schemas.microsoft.com/office/drawing/2014/main" id="{96E512E4-AC9B-C4CB-87BB-F41AC07755C4}"/>
+              </a:ext>
+            </a:extLst>
+          </p:cNvPr>
+          <p:cNvSpPr/>
+          <p:nvPr/>
+        </p:nvSpPr>
+        <p:spPr>
+          <a:xfrm>
+            <a:off x="8697862" y="1406582"/>
+            <a:ext cx="926206" cy="771787"/>
+          </a:xfrm>
+          <a:prstGeom prst="roundRect">
+            <a:avLst/>
+          </a:prstGeom>
+        </p:spPr>
+        <p:style>
+          <a:lnRef idx="2">
+            <a:schemeClr val="accent1">
+              <a:shade val="15000"/>
+            </a:schemeClr>
+          </a:lnRef>
+          <a:fillRef idx="1">
+            <a:schemeClr val="accent1"/>
+          </a:fillRef>
+          <a:effectRef idx="0">
+            <a:schemeClr val="accent1"/>
+          </a:effectRef>
+          <a:fontRef idx="minor">
+            <a:schemeClr val="lt1"/>
+          </a:fontRef>
+        </p:style>
+        <p:txBody>
+          <a:bodyPr rtlCol="0" anchor="ctr"/>
+          <a:lstStyle/>
+          <a:p>
+            <a:pPr algn="ctr"/>
+            <a:r>
+              <a:rPr lang="es-CL" dirty="0"/>
+              <a:t>LED</a:t>
+            </a:r>
+            <a:endParaRPr lang="en-US" dirty="0"/>
+          </a:p>
+        </p:txBody>
+      </p:sp>
+      <p:sp>
+        <p:nvSpPr>
+          <p:cNvPr id="59" name="Rectangle: Rounded Corners 58">
+            <a:extLst>
+              <a:ext uri="{FF2B5EF4-FFF2-40B4-BE49-F238E27FC236}">
+                <a16:creationId xmlns:a16="http://schemas.microsoft.com/office/drawing/2014/main" id="{811F5E22-0411-644E-19C1-3148D4460FC3}"/>
+              </a:ext>
+            </a:extLst>
+          </p:cNvPr>
+          <p:cNvSpPr/>
+          <p:nvPr/>
+        </p:nvSpPr>
+        <p:spPr>
+          <a:xfrm>
+            <a:off x="8697862" y="2189227"/>
+            <a:ext cx="926206" cy="771787"/>
+          </a:xfrm>
+          <a:prstGeom prst="roundRect">
+            <a:avLst/>
+          </a:prstGeom>
+        </p:spPr>
+        <p:style>
+          <a:lnRef idx="2">
+            <a:schemeClr val="accent1">
+              <a:shade val="15000"/>
+            </a:schemeClr>
+          </a:lnRef>
+          <a:fillRef idx="1">
+            <a:schemeClr val="accent1"/>
+          </a:fillRef>
+          <a:effectRef idx="0">
+            <a:schemeClr val="accent1"/>
+          </a:effectRef>
+          <a:fontRef idx="minor">
+            <a:schemeClr val="lt1"/>
+          </a:fontRef>
+        </p:style>
+        <p:txBody>
+          <a:bodyPr rtlCol="0" anchor="ctr"/>
+          <a:lstStyle/>
+          <a:p>
+            <a:pPr algn="ctr"/>
+            <a:r>
+              <a:rPr lang="es-CL" dirty="0"/>
+              <a:t>LED driver</a:t>
+            </a:r>
+            <a:endParaRPr lang="en-US" dirty="0"/>
+          </a:p>
+        </p:txBody>
+      </p:sp>
+      <p:sp>
+        <p:nvSpPr>
+          <p:cNvPr id="60" name="Rectangle: Rounded Corners 59">
+            <a:extLst>
+              <a:ext uri="{FF2B5EF4-FFF2-40B4-BE49-F238E27FC236}">
+                <a16:creationId xmlns:a16="http://schemas.microsoft.com/office/drawing/2014/main" id="{E8AB2338-EE84-477D-23DD-EC3B1AE776DD}"/>
+              </a:ext>
+            </a:extLst>
+          </p:cNvPr>
+          <p:cNvSpPr/>
+          <p:nvPr/>
+        </p:nvSpPr>
+        <p:spPr>
+          <a:xfrm>
+            <a:off x="8189635" y="1602859"/>
+            <a:ext cx="926206" cy="771787"/>
+          </a:xfrm>
+          <a:prstGeom prst="roundRect">
+            <a:avLst/>
+          </a:prstGeom>
+        </p:spPr>
+        <p:style>
+          <a:lnRef idx="2">
+            <a:schemeClr val="accent1">
+              <a:shade val="15000"/>
+            </a:schemeClr>
+          </a:lnRef>
+          <a:fillRef idx="1">
+            <a:schemeClr val="accent1"/>
+          </a:fillRef>
+          <a:effectRef idx="0">
+            <a:schemeClr val="accent1"/>
+          </a:effectRef>
+          <a:fontRef idx="minor">
+            <a:schemeClr val="lt1"/>
+          </a:fontRef>
+        </p:style>
+        <p:txBody>
+          <a:bodyPr rtlCol="0" anchor="ctr"/>
+          <a:lstStyle/>
+          <a:p>
+            <a:pPr algn="ctr"/>
+            <a:r>
+              <a:rPr lang="es-CL" dirty="0"/>
+              <a:t>LED</a:t>
+            </a:r>
+            <a:endParaRPr lang="en-US" dirty="0"/>
+          </a:p>
+        </p:txBody>
+      </p:sp>
+      <p:sp>
+        <p:nvSpPr>
+          <p:cNvPr id="61" name="Rectangle: Rounded Corners 60">
+            <a:extLst>
+              <a:ext uri="{FF2B5EF4-FFF2-40B4-BE49-F238E27FC236}">
+                <a16:creationId xmlns:a16="http://schemas.microsoft.com/office/drawing/2014/main" id="{32BC5769-DB4D-86B7-EDBD-197358B41334}"/>
+              </a:ext>
+            </a:extLst>
+          </p:cNvPr>
+          <p:cNvSpPr/>
+          <p:nvPr/>
+        </p:nvSpPr>
+        <p:spPr>
+          <a:xfrm>
+            <a:off x="8189635" y="2385504"/>
+            <a:ext cx="926206" cy="771787"/>
+          </a:xfrm>
+          <a:prstGeom prst="roundRect">
+            <a:avLst/>
+          </a:prstGeom>
+        </p:spPr>
+        <p:style>
+          <a:lnRef idx="2">
+            <a:schemeClr val="accent1">
+              <a:shade val="15000"/>
+            </a:schemeClr>
+          </a:lnRef>
+          <a:fillRef idx="1">
+            <a:schemeClr val="accent1"/>
+          </a:fillRef>
+          <a:effectRef idx="0">
+            <a:schemeClr val="accent1"/>
+          </a:effectRef>
+          <a:fontRef idx="minor">
+            <a:schemeClr val="lt1"/>
+          </a:fontRef>
+        </p:style>
+        <p:txBody>
+          <a:bodyPr rtlCol="0" anchor="ctr"/>
+          <a:lstStyle/>
+          <a:p>
+            <a:pPr algn="ctr"/>
+            <a:r>
+              <a:rPr lang="es-CL" dirty="0"/>
+              <a:t>LED driver</a:t>
+            </a:r>
+            <a:endParaRPr lang="en-US" dirty="0"/>
+          </a:p>
+        </p:txBody>
+      </p:sp>
+      <p:sp>
+        <p:nvSpPr>
+          <p:cNvPr id="101" name="Rectangle: Rounded Corners 100">
+            <a:extLst>
+              <a:ext uri="{FF2B5EF4-FFF2-40B4-BE49-F238E27FC236}">
+                <a16:creationId xmlns:a16="http://schemas.microsoft.com/office/drawing/2014/main" id="{482719C1-F580-2F7E-014E-670ED7BA6667}"/>
+              </a:ext>
+            </a:extLst>
+          </p:cNvPr>
+          <p:cNvSpPr/>
+          <p:nvPr/>
+        </p:nvSpPr>
+        <p:spPr>
+          <a:xfrm>
+            <a:off x="11291329" y="955708"/>
+            <a:ext cx="401275" cy="283833"/>
+          </a:xfrm>
+          <a:prstGeom prst="roundRect">
+            <a:avLst/>
+          </a:prstGeom>
+        </p:spPr>
+        <p:style>
+          <a:lnRef idx="2">
+            <a:schemeClr val="accent2">
+              <a:shade val="15000"/>
+            </a:schemeClr>
+          </a:lnRef>
+          <a:fillRef idx="1">
+            <a:schemeClr val="accent2"/>
+          </a:fillRef>
+          <a:effectRef idx="0">
+            <a:schemeClr val="accent2"/>
+          </a:effectRef>
+          <a:fontRef idx="minor">
+            <a:schemeClr val="lt1"/>
+          </a:fontRef>
+        </p:style>
+        <p:txBody>
+          <a:bodyPr rtlCol="0" anchor="ctr"/>
+          <a:lstStyle/>
+          <a:p>
+            <a:pPr algn="ctr"/>
+            <a:r>
+              <a:rPr lang="es-CL" sz="1400" dirty="0"/>
+              <a:t>T1</a:t>
+            </a:r>
+            <a:endParaRPr lang="en-US" sz="1400" dirty="0"/>
+          </a:p>
+        </p:txBody>
+      </p:sp>
+      <p:sp>
+        <p:nvSpPr>
+          <p:cNvPr id="2" name="Rectangle: Rounded Corners 1">
+            <a:extLst>
+              <a:ext uri="{FF2B5EF4-FFF2-40B4-BE49-F238E27FC236}">
+                <a16:creationId xmlns:a16="http://schemas.microsoft.com/office/drawing/2014/main" id="{5D8493F2-CCC5-7CF8-2810-A32A53F5E76E}"/>
+              </a:ext>
+            </a:extLst>
+          </p:cNvPr>
+          <p:cNvSpPr/>
+          <p:nvPr/>
+        </p:nvSpPr>
+        <p:spPr>
+          <a:xfrm>
+            <a:off x="11261085" y="1864208"/>
+            <a:ext cx="401275" cy="283833"/>
+          </a:xfrm>
+          <a:prstGeom prst="roundRect">
+            <a:avLst/>
+          </a:prstGeom>
+        </p:spPr>
+        <p:style>
+          <a:lnRef idx="2">
+            <a:schemeClr val="accent4">
+              <a:shade val="15000"/>
+            </a:schemeClr>
+          </a:lnRef>
+          <a:fillRef idx="1">
+            <a:schemeClr val="accent4"/>
+          </a:fillRef>
+          <a:effectRef idx="0">
+            <a:schemeClr val="accent4"/>
+          </a:effectRef>
+          <a:fontRef idx="minor">
+            <a:schemeClr val="lt1"/>
+          </a:fontRef>
+        </p:style>
+        <p:txBody>
+          <a:bodyPr rtlCol="0" anchor="ctr"/>
+          <a:lstStyle/>
+          <a:p>
+            <a:pPr algn="ctr"/>
+            <a:r>
+              <a:rPr lang="es-CL" sz="1400" dirty="0">
+                <a:ln w="0"/>
+                <a:solidFill>
+                  <a:schemeClr val="tx1"/>
+                </a:solidFill>
+                <a:effectLst>
+                  <a:outerShdw blurRad="38100" dist="19050" dir="2700000" algn="tl" rotWithShape="0">
+                    <a:schemeClr val="dk1">
+                      <a:alpha val="40000"/>
+                    </a:schemeClr>
+                  </a:outerShdw>
+                </a:effectLst>
+              </a:rPr>
+              <a:t>T3</a:t>
+            </a:r>
+            <a:endParaRPr lang="en-US" sz="1400" dirty="0">
+              <a:ln w="0"/>
+              <a:solidFill>
+                <a:schemeClr val="tx1"/>
+              </a:solidFill>
+              <a:effectLst>
+                <a:outerShdw blurRad="38100" dist="19050" dir="2700000" algn="tl" rotWithShape="0">
+                  <a:schemeClr val="dk1">
+                    <a:alpha val="40000"/>
+                  </a:schemeClr>
+                </a:outerShdw>
+              </a:effectLst>
+            </a:endParaRPr>
+          </a:p>
+        </p:txBody>
+      </p:sp>
+      <p:sp>
+        <p:nvSpPr>
+          <p:cNvPr id="5" name="Rectangle: Rounded Corners 4">
+            <a:extLst>
+              <a:ext uri="{FF2B5EF4-FFF2-40B4-BE49-F238E27FC236}">
+                <a16:creationId xmlns:a16="http://schemas.microsoft.com/office/drawing/2014/main" id="{872CD837-96F8-6E12-3DC4-2389E2172D4A}"/>
+              </a:ext>
+            </a:extLst>
+          </p:cNvPr>
+          <p:cNvSpPr/>
+          <p:nvPr/>
+        </p:nvSpPr>
+        <p:spPr>
+          <a:xfrm>
+            <a:off x="11569053" y="3167553"/>
             <a:ext cx="401275" cy="283833"/>
           </a:xfrm>
           <a:prstGeom prst="roundRect">
@@ -3432,12 +4591,102 @@
           </a:p>
         </p:txBody>
       </p:sp>
-      <p:sp>
-        <p:nvSpPr>
-          <p:cNvPr id="6" name="Rectangle: Rounded Corners 5">
-            <a:extLst>
-              <a:ext uri="{FF2B5EF4-FFF2-40B4-BE49-F238E27FC236}">
-                <a16:creationId xmlns:a16="http://schemas.microsoft.com/office/drawing/2014/main" id="{ECDC8EFA-77E9-7B31-0AEF-51A0E8DFD9EE}"/>
+      <p:cxnSp>
+        <p:nvCxnSpPr>
+          <p:cNvPr id="62" name="Straight Connector 61">
+            <a:extLst>
+              <a:ext uri="{FF2B5EF4-FFF2-40B4-BE49-F238E27FC236}">
+                <a16:creationId xmlns:a16="http://schemas.microsoft.com/office/drawing/2014/main" id="{069E8D6B-6772-68BB-F72E-D134EB4BBF54}"/>
+              </a:ext>
+            </a:extLst>
+          </p:cNvPr>
+          <p:cNvCxnSpPr>
+            <a:cxnSpLocks/>
+          </p:cNvCxnSpPr>
+          <p:nvPr/>
+        </p:nvCxnSpPr>
+        <p:spPr>
+          <a:xfrm>
+            <a:off x="5252983" y="0"/>
+            <a:ext cx="0" cy="4953477"/>
+          </a:xfrm>
+          <a:prstGeom prst="line">
+            <a:avLst/>
+          </a:prstGeom>
+          <a:ln w="19050" cap="flat" cmpd="sng" algn="ctr">
+            <a:solidFill>
+              <a:schemeClr val="dk1"/>
+            </a:solidFill>
+            <a:prstDash val="dash"/>
+            <a:round/>
+            <a:headEnd type="none" w="med" len="med"/>
+            <a:tailEnd type="none" w="med" len="med"/>
+          </a:ln>
+        </p:spPr>
+        <p:style>
+          <a:lnRef idx="0">
+            <a:scrgbClr r="0" g="0" b="0"/>
+          </a:lnRef>
+          <a:fillRef idx="0">
+            <a:scrgbClr r="0" g="0" b="0"/>
+          </a:fillRef>
+          <a:effectRef idx="0">
+            <a:scrgbClr r="0" g="0" b="0"/>
+          </a:effectRef>
+          <a:fontRef idx="minor">
+            <a:schemeClr val="tx1"/>
+          </a:fontRef>
+        </p:style>
+      </p:cxnSp>
+      <p:cxnSp>
+        <p:nvCxnSpPr>
+          <p:cNvPr id="66" name="Straight Arrow Connector 65">
+            <a:extLst>
+              <a:ext uri="{FF2B5EF4-FFF2-40B4-BE49-F238E27FC236}">
+                <a16:creationId xmlns:a16="http://schemas.microsoft.com/office/drawing/2014/main" id="{0742D0B1-BEDB-FC60-3167-4FDAB4D794A8}"/>
+              </a:ext>
+            </a:extLst>
+          </p:cNvPr>
+          <p:cNvCxnSpPr>
+            <a:cxnSpLocks/>
+            <a:stCxn id="56" idx="2"/>
+            <a:endCxn id="41" idx="0"/>
+          </p:cNvCxnSpPr>
+          <p:nvPr/>
+        </p:nvCxnSpPr>
+        <p:spPr>
+          <a:xfrm>
+            <a:off x="9783598" y="2814133"/>
+            <a:ext cx="6536" cy="440315"/>
+          </a:xfrm>
+          <a:prstGeom prst="straightConnector1">
+            <a:avLst/>
+          </a:prstGeom>
+          <a:ln>
+            <a:tailEnd type="triangle"/>
+          </a:ln>
+        </p:spPr>
+        <p:style>
+          <a:lnRef idx="1">
+            <a:schemeClr val="accent1"/>
+          </a:lnRef>
+          <a:fillRef idx="0">
+            <a:schemeClr val="accent1"/>
+          </a:fillRef>
+          <a:effectRef idx="0">
+            <a:schemeClr val="accent1"/>
+          </a:effectRef>
+          <a:fontRef idx="minor">
+            <a:schemeClr val="tx1"/>
+          </a:fontRef>
+        </p:style>
+      </p:cxnSp>
+      <p:sp>
+        <p:nvSpPr>
+          <p:cNvPr id="9" name="Rectangle: Rounded Corners 8">
+            <a:extLst>
+              <a:ext uri="{FF2B5EF4-FFF2-40B4-BE49-F238E27FC236}">
+                <a16:creationId xmlns:a16="http://schemas.microsoft.com/office/drawing/2014/main" id="{17F4228F-D38F-E594-64D3-020C856B38AD}"/>
               </a:ext>
             </a:extLst>
           </p:cNvPr>
@@ -3446,62 +4695,15 @@
         </p:nvSpPr>
         <p:spPr>
           <a:xfrm>
-            <a:off x="2501312" y="2287889"/>
-            <a:ext cx="1585519" cy="771787"/>
+            <a:off x="6916378" y="3189291"/>
+            <a:ext cx="401275" cy="283833"/>
           </a:xfrm>
           <a:prstGeom prst="roundRect">
             <a:avLst/>
           </a:prstGeom>
-        </p:spPr>
-        <p:style>
-          <a:lnRef idx="2">
-            <a:schemeClr val="accent1">
-              <a:shade val="15000"/>
-            </a:schemeClr>
-          </a:lnRef>
-          <a:fillRef idx="1">
-            <a:schemeClr val="accent1"/>
-          </a:fillRef>
-          <a:effectRef idx="0">
-            <a:schemeClr val="accent1"/>
-          </a:effectRef>
-          <a:fontRef idx="minor">
-            <a:schemeClr val="lt1"/>
-          </a:fontRef>
-        </p:style>
-        <p:txBody>
-          <a:bodyPr rtlCol="0" anchor="ctr"/>
-          <a:lstStyle/>
-          <a:p>
-            <a:pPr algn="ctr"/>
-            <a:r>
-              <a:rPr lang="es-CL" dirty="0"/>
-              <a:t>Amplificador 1</a:t>
-            </a:r>
-            <a:endParaRPr lang="en-US" dirty="0"/>
-          </a:p>
-        </p:txBody>
-      </p:sp>
-      <p:sp>
-        <p:nvSpPr>
-          <p:cNvPr id="7" name="Rectangle: Rounded Corners 6">
-            <a:extLst>
-              <a:ext uri="{FF2B5EF4-FFF2-40B4-BE49-F238E27FC236}">
-                <a16:creationId xmlns:a16="http://schemas.microsoft.com/office/drawing/2014/main" id="{9F4373F1-D9C5-63A7-03CF-CE3F9390E64C}"/>
-              </a:ext>
-            </a:extLst>
-          </p:cNvPr>
-          <p:cNvSpPr/>
-          <p:nvPr/>
-        </p:nvSpPr>
-        <p:spPr>
-          <a:xfrm>
-            <a:off x="3886193" y="2109678"/>
-            <a:ext cx="401275" cy="283833"/>
-          </a:xfrm>
-          <a:prstGeom prst="roundRect">
-            <a:avLst/>
-          </a:prstGeom>
+          <a:solidFill>
+            <a:srgbClr val="00B0F0"/>
+          </a:solidFill>
         </p:spPr>
         <p:style>
           <a:lnRef idx="2">
@@ -3526,7 +4728,7 @@
             <a:pPr algn="ctr"/>
             <a:r>
               <a:rPr lang="es-CL" sz="1400" dirty="0"/>
-              <a:t>T1</a:t>
+              <a:t>T4</a:t>
             </a:r>
             <a:endParaRPr lang="en-US" sz="1400" dirty="0"/>
           </a:p>
@@ -3534,10 +4736,10 @@
       </p:sp>
       <p:sp>
         <p:nvSpPr>
-          <p:cNvPr id="8" name="Rectangle: Rounded Corners 7">
-            <a:extLst>
-              <a:ext uri="{FF2B5EF4-FFF2-40B4-BE49-F238E27FC236}">
-                <a16:creationId xmlns:a16="http://schemas.microsoft.com/office/drawing/2014/main" id="{8A3CF87C-1899-6BB2-C935-59BD4BE1086C}"/>
+          <p:cNvPr id="73" name="Rectangle: Rounded Corners 72">
+            <a:extLst>
+              <a:ext uri="{FF2B5EF4-FFF2-40B4-BE49-F238E27FC236}">
+                <a16:creationId xmlns:a16="http://schemas.microsoft.com/office/drawing/2014/main" id="{ABAD6336-098C-1629-07D9-58493F7638C6}"/>
               </a:ext>
             </a:extLst>
           </p:cNvPr>
@@ -3546,7 +4748,7 @@
         </p:nvSpPr>
         <p:spPr>
           <a:xfrm>
-            <a:off x="4678952" y="2287889"/>
+            <a:off x="3334692" y="1889268"/>
             <a:ext cx="1585519" cy="771787"/>
           </a:xfrm>
           <a:prstGeom prst="roundRect">
@@ -3576,7 +4778,7 @@
             <a:pPr algn="ctr"/>
             <a:r>
               <a:rPr lang="es-CL" dirty="0"/>
-              <a:t>Filtro 1*</a:t>
+              <a:t>Multivibrador</a:t>
             </a:r>
             <a:endParaRPr lang="en-US" dirty="0"/>
           </a:p>
@@ -3584,10 +4786,46 @@
       </p:sp>
       <p:sp>
         <p:nvSpPr>
-          <p:cNvPr id="9" name="Rectangle: Rounded Corners 8">
-            <a:extLst>
-              <a:ext uri="{FF2B5EF4-FFF2-40B4-BE49-F238E27FC236}">
-                <a16:creationId xmlns:a16="http://schemas.microsoft.com/office/drawing/2014/main" id="{17F4228F-D38F-E594-64D3-020C856B38AD}"/>
+          <p:cNvPr id="75" name="TextBox 74">
+            <a:extLst>
+              <a:ext uri="{FF2B5EF4-FFF2-40B4-BE49-F238E27FC236}">
+                <a16:creationId xmlns:a16="http://schemas.microsoft.com/office/drawing/2014/main" id="{78A3795C-1EEA-4CBE-F14E-B2F68FFFEB5C}"/>
+              </a:ext>
+            </a:extLst>
+          </p:cNvPr>
+          <p:cNvSpPr txBox="1"/>
+          <p:nvPr/>
+        </p:nvSpPr>
+        <p:spPr>
+          <a:xfrm>
+            <a:off x="5746419" y="621029"/>
+            <a:ext cx="4369050" cy="369332"/>
+          </a:xfrm>
+          <a:prstGeom prst="rect">
+            <a:avLst/>
+          </a:prstGeom>
+          <a:noFill/>
+        </p:spPr>
+        <p:txBody>
+          <a:bodyPr wrap="square" rtlCol="0">
+            <a:spAutoFit/>
+          </a:bodyPr>
+          <a:lstStyle/>
+          <a:p>
+            <a:r>
+              <a:rPr lang="es-CL" dirty="0"/>
+              <a:t>Placa 1: Visualización de la señal</a:t>
+            </a:r>
+            <a:endParaRPr lang="en-US" dirty="0"/>
+          </a:p>
+        </p:txBody>
+      </p:sp>
+      <p:sp>
+        <p:nvSpPr>
+          <p:cNvPr id="76" name="Rectangle: Rounded Corners 75">
+            <a:extLst>
+              <a:ext uri="{FF2B5EF4-FFF2-40B4-BE49-F238E27FC236}">
+                <a16:creationId xmlns:a16="http://schemas.microsoft.com/office/drawing/2014/main" id="{652B3318-2763-ED68-C771-DB5F77C2E8DE}"/>
               </a:ext>
             </a:extLst>
           </p:cNvPr>
@@ -3596,14 +4834,164 @@
         </p:nvSpPr>
         <p:spPr>
           <a:xfrm>
-            <a:off x="6022206" y="2145972"/>
+            <a:off x="3329812" y="2868863"/>
+            <a:ext cx="1585519" cy="771787"/>
+          </a:xfrm>
+          <a:prstGeom prst="roundRect">
+            <a:avLst/>
+          </a:prstGeom>
+        </p:spPr>
+        <p:style>
+          <a:lnRef idx="2">
+            <a:schemeClr val="accent1">
+              <a:shade val="15000"/>
+            </a:schemeClr>
+          </a:lnRef>
+          <a:fillRef idx="1">
+            <a:schemeClr val="accent1"/>
+          </a:fillRef>
+          <a:effectRef idx="0">
+            <a:schemeClr val="accent1"/>
+          </a:effectRef>
+          <a:fontRef idx="minor">
+            <a:schemeClr val="lt1"/>
+          </a:fontRef>
+        </p:style>
+        <p:txBody>
+          <a:bodyPr rtlCol="0" anchor="ctr"/>
+          <a:lstStyle/>
+          <a:p>
+            <a:pPr algn="ctr"/>
+            <a:r>
+              <a:rPr lang="es-CL" dirty="0"/>
+              <a:t>Filtro</a:t>
+            </a:r>
+            <a:endParaRPr lang="en-US" dirty="0"/>
+          </a:p>
+        </p:txBody>
+      </p:sp>
+      <p:sp>
+        <p:nvSpPr>
+          <p:cNvPr id="77" name="Rectangle: Rounded Corners 76">
+            <a:extLst>
+              <a:ext uri="{FF2B5EF4-FFF2-40B4-BE49-F238E27FC236}">
+                <a16:creationId xmlns:a16="http://schemas.microsoft.com/office/drawing/2014/main" id="{76859789-4863-3577-E314-41B19B077E02}"/>
+              </a:ext>
+            </a:extLst>
+          </p:cNvPr>
+          <p:cNvSpPr/>
+          <p:nvPr/>
+        </p:nvSpPr>
+        <p:spPr>
+          <a:xfrm>
+            <a:off x="3329811" y="818252"/>
+            <a:ext cx="1585519" cy="771787"/>
+          </a:xfrm>
+          <a:prstGeom prst="roundRect">
+            <a:avLst/>
+          </a:prstGeom>
+        </p:spPr>
+        <p:style>
+          <a:lnRef idx="2">
+            <a:schemeClr val="accent1">
+              <a:shade val="15000"/>
+            </a:schemeClr>
+          </a:lnRef>
+          <a:fillRef idx="1">
+            <a:schemeClr val="accent1"/>
+          </a:fillRef>
+          <a:effectRef idx="0">
+            <a:schemeClr val="accent1"/>
+          </a:effectRef>
+          <a:fontRef idx="minor">
+            <a:schemeClr val="lt1"/>
+          </a:fontRef>
+        </p:style>
+        <p:txBody>
+          <a:bodyPr rtlCol="0" anchor="ctr"/>
+          <a:lstStyle/>
+          <a:p>
+            <a:pPr algn="ctr"/>
+            <a:r>
+              <a:rPr lang="es-CL" dirty="0"/>
+              <a:t>Sensor 2</a:t>
+            </a:r>
+            <a:endParaRPr lang="en-US" dirty="0"/>
+          </a:p>
+        </p:txBody>
+      </p:sp>
+      <p:sp>
+        <p:nvSpPr>
+          <p:cNvPr id="79" name="Rectangle: Rounded Corners 78">
+            <a:extLst>
+              <a:ext uri="{FF2B5EF4-FFF2-40B4-BE49-F238E27FC236}">
+                <a16:creationId xmlns:a16="http://schemas.microsoft.com/office/drawing/2014/main" id="{984F5448-E4AA-961D-95F2-EE8996344A26}"/>
+              </a:ext>
+            </a:extLst>
+          </p:cNvPr>
+          <p:cNvSpPr/>
+          <p:nvPr/>
+        </p:nvSpPr>
+        <p:spPr>
+          <a:xfrm>
+            <a:off x="3334692" y="3925796"/>
+            <a:ext cx="1585519" cy="771787"/>
+          </a:xfrm>
+          <a:prstGeom prst="roundRect">
+            <a:avLst/>
+          </a:prstGeom>
+        </p:spPr>
+        <p:style>
+          <a:lnRef idx="2">
+            <a:schemeClr val="accent1">
+              <a:shade val="15000"/>
+            </a:schemeClr>
+          </a:lnRef>
+          <a:fillRef idx="1">
+            <a:schemeClr val="accent1"/>
+          </a:fillRef>
+          <a:effectRef idx="0">
+            <a:schemeClr val="accent1"/>
+          </a:effectRef>
+          <a:fontRef idx="minor">
+            <a:schemeClr val="lt1"/>
+          </a:fontRef>
+        </p:style>
+        <p:txBody>
+          <a:bodyPr rtlCol="0" anchor="ctr"/>
+          <a:lstStyle/>
+          <a:p>
+            <a:pPr algn="ctr"/>
+            <a:r>
+              <a:rPr lang="es-CL" dirty="0"/>
+              <a:t>Detector de envolvente</a:t>
+            </a:r>
+            <a:endParaRPr lang="en-US" dirty="0"/>
+          </a:p>
+        </p:txBody>
+      </p:sp>
+      <p:sp>
+        <p:nvSpPr>
+          <p:cNvPr id="115" name="Rectangle: Rounded Corners 114">
+            <a:extLst>
+              <a:ext uri="{FF2B5EF4-FFF2-40B4-BE49-F238E27FC236}">
+                <a16:creationId xmlns:a16="http://schemas.microsoft.com/office/drawing/2014/main" id="{1FD20DC2-D23C-444C-1446-3ECE976D35D5}"/>
+              </a:ext>
+            </a:extLst>
+          </p:cNvPr>
+          <p:cNvSpPr/>
+          <p:nvPr/>
+        </p:nvSpPr>
+        <p:spPr>
+          <a:xfrm>
+            <a:off x="4604801" y="3829063"/>
             <a:ext cx="401275" cy="283833"/>
           </a:xfrm>
           <a:prstGeom prst="roundRect">
             <a:avLst/>
           </a:prstGeom>
           <a:solidFill>
-            <a:srgbClr val="00B0F0"/>
+            <a:srgbClr val="FF0000"/>
           </a:solidFill>
         </p:spPr>
         <p:style>
@@ -3629,7 +5017,7 @@
             <a:pPr algn="ctr"/>
             <a:r>
               <a:rPr lang="es-CL" sz="1400" dirty="0"/>
-              <a:t>T4</a:t>
+              <a:t>T5</a:t>
             </a:r>
             <a:endParaRPr lang="en-US" sz="1400" dirty="0"/>
           </a:p>
@@ -3637,10 +5025,10 @@
       </p:sp>
       <p:sp>
         <p:nvSpPr>
-          <p:cNvPr id="10" name="Rectangle: Rounded Corners 9">
-            <a:extLst>
-              <a:ext uri="{FF2B5EF4-FFF2-40B4-BE49-F238E27FC236}">
-                <a16:creationId xmlns:a16="http://schemas.microsoft.com/office/drawing/2014/main" id="{26417C96-4FDD-A40F-DABE-6FDDD98877C8}"/>
+          <p:cNvPr id="48" name="Rectangle: Rounded Corners 47">
+            <a:extLst>
+              <a:ext uri="{FF2B5EF4-FFF2-40B4-BE49-F238E27FC236}">
+                <a16:creationId xmlns:a16="http://schemas.microsoft.com/office/drawing/2014/main" id="{19F4B2FE-CE31-5208-4799-104527E594FF}"/>
               </a:ext>
             </a:extLst>
           </p:cNvPr>
@@ -3649,112 +5037,15 @@
         </p:nvSpPr>
         <p:spPr>
           <a:xfrm>
-            <a:off x="7054744" y="2287889"/>
-            <a:ext cx="1585519" cy="771787"/>
+            <a:off x="4666510" y="2745104"/>
+            <a:ext cx="401275" cy="283833"/>
           </a:xfrm>
           <a:prstGeom prst="roundRect">
             <a:avLst/>
           </a:prstGeom>
-        </p:spPr>
-        <p:style>
-          <a:lnRef idx="2">
-            <a:schemeClr val="accent1">
-              <a:shade val="15000"/>
-            </a:schemeClr>
-          </a:lnRef>
-          <a:fillRef idx="1">
-            <a:schemeClr val="accent1"/>
-          </a:fillRef>
-          <a:effectRef idx="0">
-            <a:schemeClr val="accent1"/>
-          </a:effectRef>
-          <a:fontRef idx="minor">
-            <a:schemeClr val="lt1"/>
-          </a:fontRef>
-        </p:style>
-        <p:txBody>
-          <a:bodyPr rtlCol="0" anchor="ctr"/>
-          <a:lstStyle/>
-          <a:p>
-            <a:pPr algn="ctr"/>
-            <a:r>
-              <a:rPr lang="es-CL" dirty="0"/>
-              <a:t>Control de volumen</a:t>
-            </a:r>
-            <a:endParaRPr lang="en-US" dirty="0"/>
-          </a:p>
-        </p:txBody>
-      </p:sp>
-      <p:sp>
-        <p:nvSpPr>
-          <p:cNvPr id="11" name="Rectangle: Rounded Corners 10">
-            <a:extLst>
-              <a:ext uri="{FF2B5EF4-FFF2-40B4-BE49-F238E27FC236}">
-                <a16:creationId xmlns:a16="http://schemas.microsoft.com/office/drawing/2014/main" id="{4B4B18DE-22FC-C146-89A0-7AA029B2D8E5}"/>
-              </a:ext>
-            </a:extLst>
-          </p:cNvPr>
-          <p:cNvSpPr/>
-          <p:nvPr/>
-        </p:nvSpPr>
-        <p:spPr>
-          <a:xfrm>
-            <a:off x="9271526" y="2287889"/>
-            <a:ext cx="1585519" cy="771787"/>
-          </a:xfrm>
-          <a:prstGeom prst="roundRect">
-            <a:avLst/>
-          </a:prstGeom>
-        </p:spPr>
-        <p:style>
-          <a:lnRef idx="2">
-            <a:schemeClr val="accent1">
-              <a:shade val="15000"/>
-            </a:schemeClr>
-          </a:lnRef>
-          <a:fillRef idx="1">
-            <a:schemeClr val="accent1"/>
-          </a:fillRef>
-          <a:effectRef idx="0">
-            <a:schemeClr val="accent1"/>
-          </a:effectRef>
-          <a:fontRef idx="minor">
-            <a:schemeClr val="lt1"/>
-          </a:fontRef>
-        </p:style>
-        <p:txBody>
-          <a:bodyPr rtlCol="0" anchor="ctr"/>
-          <a:lstStyle/>
-          <a:p>
-            <a:pPr algn="ctr"/>
-            <a:r>
-              <a:rPr lang="es-CL" dirty="0"/>
-              <a:t>Amplificador de audio</a:t>
-            </a:r>
-            <a:endParaRPr lang="en-US" dirty="0"/>
-          </a:p>
-        </p:txBody>
-      </p:sp>
-      <p:sp>
-        <p:nvSpPr>
-          <p:cNvPr id="12" name="Rectangle: Rounded Corners 11">
-            <a:extLst>
-              <a:ext uri="{FF2B5EF4-FFF2-40B4-BE49-F238E27FC236}">
-                <a16:creationId xmlns:a16="http://schemas.microsoft.com/office/drawing/2014/main" id="{B095B256-5072-439C-43DA-CED3D7C81379}"/>
-              </a:ext>
-            </a:extLst>
-          </p:cNvPr>
-          <p:cNvSpPr/>
-          <p:nvPr/>
-        </p:nvSpPr>
-        <p:spPr>
-          <a:xfrm>
-            <a:off x="10031244" y="2145972"/>
-            <a:ext cx="401275" cy="283833"/>
-          </a:xfrm>
-          <a:prstGeom prst="roundRect">
-            <a:avLst/>
-          </a:prstGeom>
+          <a:solidFill>
+            <a:srgbClr val="7030A0"/>
+          </a:solidFill>
         </p:spPr>
         <p:style>
           <a:lnRef idx="2">
@@ -3779,7 +5070,7 @@
             <a:pPr algn="ctr"/>
             <a:r>
               <a:rPr lang="es-CL" sz="1400" dirty="0"/>
-              <a:t>T1</a:t>
+              <a:t>T6</a:t>
             </a:r>
             <a:endParaRPr lang="en-US" sz="1400" dirty="0"/>
           </a:p>
@@ -3787,10 +5078,10 @@
       </p:sp>
       <p:sp>
         <p:nvSpPr>
-          <p:cNvPr id="14" name="Rectangle: Rounded Corners 13">
-            <a:extLst>
-              <a:ext uri="{FF2B5EF4-FFF2-40B4-BE49-F238E27FC236}">
-                <a16:creationId xmlns:a16="http://schemas.microsoft.com/office/drawing/2014/main" id="{C18804AF-EDD4-92FA-885A-0A99579EBBB2}"/>
+          <p:cNvPr id="26" name="Rectangle: Rounded Corners 25">
+            <a:extLst>
+              <a:ext uri="{FF2B5EF4-FFF2-40B4-BE49-F238E27FC236}">
+                <a16:creationId xmlns:a16="http://schemas.microsoft.com/office/drawing/2014/main" id="{0286FDBB-7D99-A39C-1FD9-C28B71DF5499}"/>
               </a:ext>
             </a:extLst>
           </p:cNvPr>
@@ -3799,349 +5090,7 @@
         </p:nvSpPr>
         <p:spPr>
           <a:xfrm>
-            <a:off x="319819" y="3805075"/>
-            <a:ext cx="1585519" cy="771787"/>
-          </a:xfrm>
-          <a:prstGeom prst="roundRect">
-            <a:avLst/>
-          </a:prstGeom>
-        </p:spPr>
-        <p:style>
-          <a:lnRef idx="2">
-            <a:schemeClr val="accent1">
-              <a:shade val="15000"/>
-            </a:schemeClr>
-          </a:lnRef>
-          <a:fillRef idx="1">
-            <a:schemeClr val="accent1"/>
-          </a:fillRef>
-          <a:effectRef idx="0">
-            <a:schemeClr val="accent1"/>
-          </a:effectRef>
-          <a:fontRef idx="minor">
-            <a:schemeClr val="lt1"/>
-          </a:fontRef>
-        </p:style>
-        <p:txBody>
-          <a:bodyPr rtlCol="0" anchor="ctr"/>
-          <a:lstStyle/>
-          <a:p>
-            <a:pPr algn="ctr"/>
-            <a:r>
-              <a:rPr lang="es-CL" dirty="0"/>
-              <a:t>Detector de envolvente</a:t>
-            </a:r>
-            <a:endParaRPr lang="en-US" dirty="0"/>
-          </a:p>
-        </p:txBody>
-      </p:sp>
-      <p:sp>
-        <p:nvSpPr>
-          <p:cNvPr id="17" name="Trapezoid 16">
-            <a:extLst>
-              <a:ext uri="{FF2B5EF4-FFF2-40B4-BE49-F238E27FC236}">
-                <a16:creationId xmlns:a16="http://schemas.microsoft.com/office/drawing/2014/main" id="{8CC4E393-7CE6-6CF2-942A-65714D79C903}"/>
-              </a:ext>
-            </a:extLst>
-          </p:cNvPr>
-          <p:cNvSpPr/>
-          <p:nvPr/>
-        </p:nvSpPr>
-        <p:spPr>
-          <a:xfrm rot="16200000">
-            <a:off x="11344725" y="2604489"/>
-            <a:ext cx="445865" cy="158698"/>
-          </a:xfrm>
-          <a:prstGeom prst="trapezoid">
-            <a:avLst/>
-          </a:prstGeom>
-        </p:spPr>
-        <p:style>
-          <a:lnRef idx="2">
-            <a:schemeClr val="accent1">
-              <a:shade val="15000"/>
-            </a:schemeClr>
-          </a:lnRef>
-          <a:fillRef idx="1">
-            <a:schemeClr val="accent1"/>
-          </a:fillRef>
-          <a:effectRef idx="0">
-            <a:schemeClr val="accent1"/>
-          </a:effectRef>
-          <a:fontRef idx="minor">
-            <a:schemeClr val="lt1"/>
-          </a:fontRef>
-        </p:style>
-        <p:txBody>
-          <a:bodyPr rtlCol="0" anchor="ctr"/>
-          <a:lstStyle/>
-          <a:p>
-            <a:pPr algn="ctr"/>
-            <a:endParaRPr lang="en-US"/>
-          </a:p>
-        </p:txBody>
-      </p:sp>
-      <p:sp>
-        <p:nvSpPr>
-          <p:cNvPr id="19" name="Rectangle 18">
-            <a:extLst>
-              <a:ext uri="{FF2B5EF4-FFF2-40B4-BE49-F238E27FC236}">
-                <a16:creationId xmlns:a16="http://schemas.microsoft.com/office/drawing/2014/main" id="{C3944E92-A1BD-786E-59CE-D0DFF1727AF5}"/>
-              </a:ext>
-            </a:extLst>
-          </p:cNvPr>
-          <p:cNvSpPr/>
-          <p:nvPr/>
-        </p:nvSpPr>
-        <p:spPr>
-          <a:xfrm rot="16200000">
-            <a:off x="11318275" y="2630940"/>
-            <a:ext cx="238045" cy="102020"/>
-          </a:xfrm>
-          <a:prstGeom prst="rect">
-            <a:avLst/>
-          </a:prstGeom>
-        </p:spPr>
-        <p:style>
-          <a:lnRef idx="2">
-            <a:schemeClr val="accent1">
-              <a:shade val="15000"/>
-            </a:schemeClr>
-          </a:lnRef>
-          <a:fillRef idx="1">
-            <a:schemeClr val="accent1"/>
-          </a:fillRef>
-          <a:effectRef idx="0">
-            <a:schemeClr val="accent1"/>
-          </a:effectRef>
-          <a:fontRef idx="minor">
-            <a:schemeClr val="lt1"/>
-          </a:fontRef>
-        </p:style>
-        <p:txBody>
-          <a:bodyPr rtlCol="0" anchor="ctr"/>
-          <a:lstStyle/>
-          <a:p>
-            <a:pPr algn="ctr"/>
-            <a:endParaRPr lang="en-US"/>
-          </a:p>
-        </p:txBody>
-      </p:sp>
-      <p:sp>
-        <p:nvSpPr>
-          <p:cNvPr id="20" name="Rectangle: Rounded Corners 19">
-            <a:extLst>
-              <a:ext uri="{FF2B5EF4-FFF2-40B4-BE49-F238E27FC236}">
-                <a16:creationId xmlns:a16="http://schemas.microsoft.com/office/drawing/2014/main" id="{6D5B386B-9274-C7DE-2DED-F7ECDEAB5F22}"/>
-              </a:ext>
-            </a:extLst>
-          </p:cNvPr>
-          <p:cNvSpPr/>
-          <p:nvPr/>
-        </p:nvSpPr>
-        <p:spPr>
-          <a:xfrm>
-            <a:off x="478765" y="631402"/>
-            <a:ext cx="1585519" cy="771787"/>
-          </a:xfrm>
-          <a:prstGeom prst="roundRect">
-            <a:avLst/>
-          </a:prstGeom>
-        </p:spPr>
-        <p:style>
-          <a:lnRef idx="2">
-            <a:schemeClr val="accent1">
-              <a:shade val="15000"/>
-            </a:schemeClr>
-          </a:lnRef>
-          <a:fillRef idx="1">
-            <a:schemeClr val="accent1"/>
-          </a:fillRef>
-          <a:effectRef idx="0">
-            <a:schemeClr val="accent1"/>
-          </a:effectRef>
-          <a:fontRef idx="minor">
-            <a:schemeClr val="lt1"/>
-          </a:fontRef>
-        </p:style>
-        <p:txBody>
-          <a:bodyPr rtlCol="0" anchor="ctr"/>
-          <a:lstStyle/>
-          <a:p>
-            <a:pPr algn="ctr"/>
-            <a:r>
-              <a:rPr lang="es-CL" dirty="0"/>
-              <a:t>batería</a:t>
-            </a:r>
-            <a:endParaRPr lang="en-US" dirty="0"/>
-          </a:p>
-        </p:txBody>
-      </p:sp>
-      <p:sp>
-        <p:nvSpPr>
-          <p:cNvPr id="22" name="Rectangle: Rounded Corners 21">
-            <a:extLst>
-              <a:ext uri="{FF2B5EF4-FFF2-40B4-BE49-F238E27FC236}">
-                <a16:creationId xmlns:a16="http://schemas.microsoft.com/office/drawing/2014/main" id="{303E9BB9-BB8C-5056-54EE-65EEC51CA02A}"/>
-              </a:ext>
-            </a:extLst>
-          </p:cNvPr>
-          <p:cNvSpPr/>
-          <p:nvPr/>
-        </p:nvSpPr>
-        <p:spPr>
-          <a:xfrm>
-            <a:off x="2501311" y="631401"/>
-            <a:ext cx="1585519" cy="771787"/>
-          </a:xfrm>
-          <a:prstGeom prst="roundRect">
-            <a:avLst/>
-          </a:prstGeom>
-        </p:spPr>
-        <p:style>
-          <a:lnRef idx="2">
-            <a:schemeClr val="accent1">
-              <a:shade val="15000"/>
-            </a:schemeClr>
-          </a:lnRef>
-          <a:fillRef idx="1">
-            <a:schemeClr val="accent1"/>
-          </a:fillRef>
-          <a:effectRef idx="0">
-            <a:schemeClr val="accent1"/>
-          </a:effectRef>
-          <a:fontRef idx="minor">
-            <a:schemeClr val="lt1"/>
-          </a:fontRef>
-        </p:style>
-        <p:txBody>
-          <a:bodyPr rtlCol="0" anchor="ctr"/>
-          <a:lstStyle/>
-          <a:p>
-            <a:pPr algn="ctr"/>
-            <a:r>
-              <a:rPr lang="es-CL" dirty="0"/>
-              <a:t>Regulador*</a:t>
-            </a:r>
-            <a:endParaRPr lang="en-US" dirty="0"/>
-          </a:p>
-        </p:txBody>
-      </p:sp>
-      <p:sp>
-        <p:nvSpPr>
-          <p:cNvPr id="24" name="Rectangle: Rounded Corners 23">
-            <a:extLst>
-              <a:ext uri="{FF2B5EF4-FFF2-40B4-BE49-F238E27FC236}">
-                <a16:creationId xmlns:a16="http://schemas.microsoft.com/office/drawing/2014/main" id="{ACC3D264-BCE4-EB95-EBAA-DA3A2DB99025}"/>
-              </a:ext>
-            </a:extLst>
-          </p:cNvPr>
-          <p:cNvSpPr/>
-          <p:nvPr/>
-        </p:nvSpPr>
-        <p:spPr>
-          <a:xfrm>
-            <a:off x="4613133" y="631401"/>
-            <a:ext cx="1585519" cy="771787"/>
-          </a:xfrm>
-          <a:prstGeom prst="roundRect">
-            <a:avLst/>
-          </a:prstGeom>
-        </p:spPr>
-        <p:style>
-          <a:lnRef idx="2">
-            <a:schemeClr val="accent1">
-              <a:shade val="15000"/>
-            </a:schemeClr>
-          </a:lnRef>
-          <a:fillRef idx="1">
-            <a:schemeClr val="accent1"/>
-          </a:fillRef>
-          <a:effectRef idx="0">
-            <a:schemeClr val="accent1"/>
-          </a:effectRef>
-          <a:fontRef idx="minor">
-            <a:schemeClr val="lt1"/>
-          </a:fontRef>
-        </p:style>
-        <p:txBody>
-          <a:bodyPr rtlCol="0" anchor="ctr"/>
-          <a:lstStyle/>
-          <a:p>
-            <a:pPr algn="ctr"/>
-            <a:r>
-              <a:rPr lang="es-CL" dirty="0"/>
-              <a:t>Tierra virtual</a:t>
-            </a:r>
-            <a:endParaRPr lang="en-US" dirty="0"/>
-          </a:p>
-        </p:txBody>
-      </p:sp>
-      <p:sp>
-        <p:nvSpPr>
-          <p:cNvPr id="25" name="Rectangle: Rounded Corners 24">
-            <a:extLst>
-              <a:ext uri="{FF2B5EF4-FFF2-40B4-BE49-F238E27FC236}">
-                <a16:creationId xmlns:a16="http://schemas.microsoft.com/office/drawing/2014/main" id="{316A8E46-F668-5276-68F4-447692D95ADE}"/>
-              </a:ext>
-            </a:extLst>
-          </p:cNvPr>
-          <p:cNvSpPr/>
-          <p:nvPr/>
-        </p:nvSpPr>
-        <p:spPr>
-          <a:xfrm>
-            <a:off x="5998014" y="553506"/>
-            <a:ext cx="401275" cy="283833"/>
-          </a:xfrm>
-          <a:prstGeom prst="roundRect">
-            <a:avLst/>
-          </a:prstGeom>
-        </p:spPr>
-        <p:style>
-          <a:lnRef idx="2">
-            <a:schemeClr val="accent6">
-              <a:shade val="15000"/>
-            </a:schemeClr>
-          </a:lnRef>
-          <a:fillRef idx="1">
-            <a:schemeClr val="accent6"/>
-          </a:fillRef>
-          <a:effectRef idx="0">
-            <a:schemeClr val="accent6"/>
-          </a:effectRef>
-          <a:fontRef idx="minor">
-            <a:schemeClr val="lt1"/>
-          </a:fontRef>
-        </p:style>
-        <p:txBody>
-          <a:bodyPr rtlCol="0" anchor="ctr"/>
-          <a:lstStyle/>
-          <a:p>
-            <a:pPr algn="ctr"/>
-            <a:r>
-              <a:rPr lang="es-CL" sz="1400" dirty="0"/>
-              <a:t>T2</a:t>
-            </a:r>
-            <a:endParaRPr lang="en-US" sz="1400" dirty="0"/>
-          </a:p>
-        </p:txBody>
-      </p:sp>
-      <p:sp>
-        <p:nvSpPr>
-          <p:cNvPr id="26" name="Rectangle: Rounded Corners 25">
-            <a:extLst>
-              <a:ext uri="{FF2B5EF4-FFF2-40B4-BE49-F238E27FC236}">
-                <a16:creationId xmlns:a16="http://schemas.microsoft.com/office/drawing/2014/main" id="{0286FDBB-7D99-A39C-1FD9-C28B71DF5499}"/>
-              </a:ext>
-            </a:extLst>
-          </p:cNvPr>
-          <p:cNvSpPr/>
-          <p:nvPr/>
-        </p:nvSpPr>
-        <p:spPr>
-          <a:xfrm>
-            <a:off x="3785873" y="489484"/>
+            <a:off x="4647054" y="1813668"/>
             <a:ext cx="401275" cy="283833"/>
           </a:xfrm>
           <a:prstGeom prst="roundRect">
@@ -4177,12 +5126,177 @@
           </a:p>
         </p:txBody>
       </p:sp>
-      <p:sp>
-        <p:nvSpPr>
-          <p:cNvPr id="27" name="Rectangle: Rounded Corners 26">
-            <a:extLst>
-              <a:ext uri="{FF2B5EF4-FFF2-40B4-BE49-F238E27FC236}">
-                <a16:creationId xmlns:a16="http://schemas.microsoft.com/office/drawing/2014/main" id="{1A11F713-E141-E5E9-6B65-5D591DBE6516}"/>
+      <p:cxnSp>
+        <p:nvCxnSpPr>
+          <p:cNvPr id="80" name="Straight Arrow Connector 79">
+            <a:extLst>
+              <a:ext uri="{FF2B5EF4-FFF2-40B4-BE49-F238E27FC236}">
+                <a16:creationId xmlns:a16="http://schemas.microsoft.com/office/drawing/2014/main" id="{5AD15DD1-91E9-A9D9-78E9-423C1D1D2F91}"/>
+              </a:ext>
+            </a:extLst>
+          </p:cNvPr>
+          <p:cNvCxnSpPr>
+            <a:cxnSpLocks/>
+            <a:stCxn id="77" idx="2"/>
+            <a:endCxn id="73" idx="0"/>
+          </p:cNvCxnSpPr>
+          <p:nvPr/>
+        </p:nvCxnSpPr>
+        <p:spPr>
+          <a:xfrm>
+            <a:off x="4122571" y="1590039"/>
+            <a:ext cx="4881" cy="299229"/>
+          </a:xfrm>
+          <a:prstGeom prst="straightConnector1">
+            <a:avLst/>
+          </a:prstGeom>
+          <a:ln>
+            <a:tailEnd type="triangle"/>
+          </a:ln>
+        </p:spPr>
+        <p:style>
+          <a:lnRef idx="1">
+            <a:schemeClr val="accent1"/>
+          </a:lnRef>
+          <a:fillRef idx="0">
+            <a:schemeClr val="accent1"/>
+          </a:fillRef>
+          <a:effectRef idx="0">
+            <a:schemeClr val="accent1"/>
+          </a:effectRef>
+          <a:fontRef idx="minor">
+            <a:schemeClr val="tx1"/>
+          </a:fontRef>
+        </p:style>
+      </p:cxnSp>
+      <p:cxnSp>
+        <p:nvCxnSpPr>
+          <p:cNvPr id="85" name="Straight Arrow Connector 84">
+            <a:extLst>
+              <a:ext uri="{FF2B5EF4-FFF2-40B4-BE49-F238E27FC236}">
+                <a16:creationId xmlns:a16="http://schemas.microsoft.com/office/drawing/2014/main" id="{DC79B417-9B11-14CB-27AA-DF9CD45FF24A}"/>
+              </a:ext>
+            </a:extLst>
+          </p:cNvPr>
+          <p:cNvCxnSpPr>
+            <a:cxnSpLocks/>
+            <a:stCxn id="73" idx="2"/>
+            <a:endCxn id="76" idx="0"/>
+          </p:cNvCxnSpPr>
+          <p:nvPr/>
+        </p:nvCxnSpPr>
+        <p:spPr>
+          <a:xfrm flipH="1">
+            <a:off x="4122572" y="2661055"/>
+            <a:ext cx="4880" cy="207808"/>
+          </a:xfrm>
+          <a:prstGeom prst="straightConnector1">
+            <a:avLst/>
+          </a:prstGeom>
+          <a:ln>
+            <a:tailEnd type="triangle"/>
+          </a:ln>
+        </p:spPr>
+        <p:style>
+          <a:lnRef idx="1">
+            <a:schemeClr val="accent1"/>
+          </a:lnRef>
+          <a:fillRef idx="0">
+            <a:schemeClr val="accent1"/>
+          </a:fillRef>
+          <a:effectRef idx="0">
+            <a:schemeClr val="accent1"/>
+          </a:effectRef>
+          <a:fontRef idx="minor">
+            <a:schemeClr val="tx1"/>
+          </a:fontRef>
+        </p:style>
+      </p:cxnSp>
+      <p:cxnSp>
+        <p:nvCxnSpPr>
+          <p:cNvPr id="91" name="Straight Arrow Connector 90">
+            <a:extLst>
+              <a:ext uri="{FF2B5EF4-FFF2-40B4-BE49-F238E27FC236}">
+                <a16:creationId xmlns:a16="http://schemas.microsoft.com/office/drawing/2014/main" id="{65FCF0D7-3F92-F062-DA98-A400B3F126C6}"/>
+              </a:ext>
+            </a:extLst>
+          </p:cNvPr>
+          <p:cNvCxnSpPr>
+            <a:cxnSpLocks/>
+            <a:stCxn id="76" idx="2"/>
+            <a:endCxn id="79" idx="0"/>
+          </p:cNvCxnSpPr>
+          <p:nvPr/>
+        </p:nvCxnSpPr>
+        <p:spPr>
+          <a:xfrm>
+            <a:off x="4122572" y="3640650"/>
+            <a:ext cx="4880" cy="285146"/>
+          </a:xfrm>
+          <a:prstGeom prst="straightConnector1">
+            <a:avLst/>
+          </a:prstGeom>
+          <a:ln>
+            <a:tailEnd type="triangle"/>
+          </a:ln>
+        </p:spPr>
+        <p:style>
+          <a:lnRef idx="1">
+            <a:schemeClr val="accent1"/>
+          </a:lnRef>
+          <a:fillRef idx="0">
+            <a:schemeClr val="accent1"/>
+          </a:fillRef>
+          <a:effectRef idx="0">
+            <a:schemeClr val="accent1"/>
+          </a:effectRef>
+          <a:fontRef idx="minor">
+            <a:schemeClr val="tx1"/>
+          </a:fontRef>
+        </p:style>
+      </p:cxnSp>
+      <p:sp>
+        <p:nvSpPr>
+          <p:cNvPr id="96" name="TextBox 95">
+            <a:extLst>
+              <a:ext uri="{FF2B5EF4-FFF2-40B4-BE49-F238E27FC236}">
+                <a16:creationId xmlns:a16="http://schemas.microsoft.com/office/drawing/2014/main" id="{04B28007-18B3-8099-3598-C64C7CEBC1AD}"/>
+              </a:ext>
+            </a:extLst>
+          </p:cNvPr>
+          <p:cNvSpPr txBox="1"/>
+          <p:nvPr/>
+        </p:nvSpPr>
+        <p:spPr>
+          <a:xfrm>
+            <a:off x="1090884" y="224067"/>
+            <a:ext cx="4369050" cy="369332"/>
+          </a:xfrm>
+          <a:prstGeom prst="rect">
+            <a:avLst/>
+          </a:prstGeom>
+          <a:noFill/>
+        </p:spPr>
+        <p:txBody>
+          <a:bodyPr wrap="square" rtlCol="0">
+            <a:spAutoFit/>
+          </a:bodyPr>
+          <a:lstStyle/>
+          <a:p>
+            <a:r>
+              <a:rPr lang="es-CL" dirty="0"/>
+              <a:t>Placa 2: Generación de la señal (AFE)</a:t>
+            </a:r>
+            <a:endParaRPr lang="en-US" dirty="0"/>
+          </a:p>
+        </p:txBody>
+      </p:sp>
+      <p:sp>
+        <p:nvSpPr>
+          <p:cNvPr id="97" name="Rectangle: Rounded Corners 96">
+            <a:extLst>
+              <a:ext uri="{FF2B5EF4-FFF2-40B4-BE49-F238E27FC236}">
+                <a16:creationId xmlns:a16="http://schemas.microsoft.com/office/drawing/2014/main" id="{C447D123-D737-DA5B-ADD6-E8C53A45D592}"/>
               </a:ext>
             </a:extLst>
           </p:cNvPr>
@@ -4191,7 +5305,7 @@
         </p:nvSpPr>
         <p:spPr>
           <a:xfrm>
-            <a:off x="6991410" y="631400"/>
+            <a:off x="534396" y="1874421"/>
             <a:ext cx="1585519" cy="771787"/>
           </a:xfrm>
           <a:prstGeom prst="roundRect">
@@ -4221,7 +5335,7 @@
             <a:pPr algn="ctr"/>
             <a:r>
               <a:rPr lang="es-CL" dirty="0"/>
-              <a:t>Luz encendido 1</a:t>
+              <a:t>Multivibrador</a:t>
             </a:r>
             <a:endParaRPr lang="en-US" dirty="0"/>
           </a:p>
@@ -4229,10 +5343,10 @@
       </p:sp>
       <p:sp>
         <p:nvSpPr>
-          <p:cNvPr id="28" name="Rectangle: Rounded Corners 27">
-            <a:extLst>
-              <a:ext uri="{FF2B5EF4-FFF2-40B4-BE49-F238E27FC236}">
-                <a16:creationId xmlns:a16="http://schemas.microsoft.com/office/drawing/2014/main" id="{EA04D2F9-78CA-AA2F-76CF-386EB6FEFC96}"/>
+          <p:cNvPr id="100" name="Rectangle: Rounded Corners 99">
+            <a:extLst>
+              <a:ext uri="{FF2B5EF4-FFF2-40B4-BE49-F238E27FC236}">
+                <a16:creationId xmlns:a16="http://schemas.microsoft.com/office/drawing/2014/main" id="{DCFCC0FF-EB6A-CDBD-8F26-61B1A958041A}"/>
               </a:ext>
             </a:extLst>
           </p:cNvPr>
@@ -4241,7 +5355,157 @@
         </p:nvSpPr>
         <p:spPr>
           <a:xfrm>
-            <a:off x="8376291" y="553506"/>
+            <a:off x="529516" y="2854016"/>
+            <a:ext cx="1585519" cy="771787"/>
+          </a:xfrm>
+          <a:prstGeom prst="roundRect">
+            <a:avLst/>
+          </a:prstGeom>
+        </p:spPr>
+        <p:style>
+          <a:lnRef idx="2">
+            <a:schemeClr val="accent1">
+              <a:shade val="15000"/>
+            </a:schemeClr>
+          </a:lnRef>
+          <a:fillRef idx="1">
+            <a:schemeClr val="accent1"/>
+          </a:fillRef>
+          <a:effectRef idx="0">
+            <a:schemeClr val="accent1"/>
+          </a:effectRef>
+          <a:fontRef idx="minor">
+            <a:schemeClr val="lt1"/>
+          </a:fontRef>
+        </p:style>
+        <p:txBody>
+          <a:bodyPr rtlCol="0" anchor="ctr"/>
+          <a:lstStyle/>
+          <a:p>
+            <a:pPr algn="ctr"/>
+            <a:r>
+              <a:rPr lang="es-CL" dirty="0"/>
+              <a:t>Filtro</a:t>
+            </a:r>
+            <a:endParaRPr lang="en-US" dirty="0"/>
+          </a:p>
+        </p:txBody>
+      </p:sp>
+      <p:sp>
+        <p:nvSpPr>
+          <p:cNvPr id="103" name="Rectangle: Rounded Corners 102">
+            <a:extLst>
+              <a:ext uri="{FF2B5EF4-FFF2-40B4-BE49-F238E27FC236}">
+                <a16:creationId xmlns:a16="http://schemas.microsoft.com/office/drawing/2014/main" id="{23E30D83-CD90-419A-2C6E-1E77079452CB}"/>
+              </a:ext>
+            </a:extLst>
+          </p:cNvPr>
+          <p:cNvSpPr/>
+          <p:nvPr/>
+        </p:nvSpPr>
+        <p:spPr>
+          <a:xfrm>
+            <a:off x="529515" y="803405"/>
+            <a:ext cx="1585519" cy="771787"/>
+          </a:xfrm>
+          <a:prstGeom prst="roundRect">
+            <a:avLst/>
+          </a:prstGeom>
+        </p:spPr>
+        <p:style>
+          <a:lnRef idx="2">
+            <a:schemeClr val="accent1">
+              <a:shade val="15000"/>
+            </a:schemeClr>
+          </a:lnRef>
+          <a:fillRef idx="1">
+            <a:schemeClr val="accent1"/>
+          </a:fillRef>
+          <a:effectRef idx="0">
+            <a:schemeClr val="accent1"/>
+          </a:effectRef>
+          <a:fontRef idx="minor">
+            <a:schemeClr val="lt1"/>
+          </a:fontRef>
+        </p:style>
+        <p:txBody>
+          <a:bodyPr rtlCol="0" anchor="ctr"/>
+          <a:lstStyle/>
+          <a:p>
+            <a:pPr algn="ctr"/>
+            <a:r>
+              <a:rPr lang="es-CL" dirty="0"/>
+              <a:t>Sensor 1</a:t>
+            </a:r>
+            <a:endParaRPr lang="en-US" dirty="0"/>
+          </a:p>
+        </p:txBody>
+      </p:sp>
+      <p:sp>
+        <p:nvSpPr>
+          <p:cNvPr id="105" name="Rectangle: Rounded Corners 104">
+            <a:extLst>
+              <a:ext uri="{FF2B5EF4-FFF2-40B4-BE49-F238E27FC236}">
+                <a16:creationId xmlns:a16="http://schemas.microsoft.com/office/drawing/2014/main" id="{70FCB5F3-20E6-8E64-0CB9-B382E7B34259}"/>
+              </a:ext>
+            </a:extLst>
+          </p:cNvPr>
+          <p:cNvSpPr/>
+          <p:nvPr/>
+        </p:nvSpPr>
+        <p:spPr>
+          <a:xfrm>
+            <a:off x="534396" y="3910949"/>
+            <a:ext cx="1585519" cy="771787"/>
+          </a:xfrm>
+          <a:prstGeom prst="roundRect">
+            <a:avLst/>
+          </a:prstGeom>
+        </p:spPr>
+        <p:style>
+          <a:lnRef idx="2">
+            <a:schemeClr val="accent1">
+              <a:shade val="15000"/>
+            </a:schemeClr>
+          </a:lnRef>
+          <a:fillRef idx="1">
+            <a:schemeClr val="accent1"/>
+          </a:fillRef>
+          <a:effectRef idx="0">
+            <a:schemeClr val="accent1"/>
+          </a:effectRef>
+          <a:fontRef idx="minor">
+            <a:schemeClr val="lt1"/>
+          </a:fontRef>
+        </p:style>
+        <p:txBody>
+          <a:bodyPr rtlCol="0" anchor="ctr"/>
+          <a:lstStyle/>
+          <a:p>
+            <a:pPr algn="ctr"/>
+            <a:r>
+              <a:rPr lang="es-CL" dirty="0"/>
+              <a:t>Detector de envolvente</a:t>
+            </a:r>
+            <a:endParaRPr lang="en-US" dirty="0"/>
+          </a:p>
+        </p:txBody>
+      </p:sp>
+      <p:sp>
+        <p:nvSpPr>
+          <p:cNvPr id="106" name="Rectangle: Rounded Corners 105">
+            <a:extLst>
+              <a:ext uri="{FF2B5EF4-FFF2-40B4-BE49-F238E27FC236}">
+                <a16:creationId xmlns:a16="http://schemas.microsoft.com/office/drawing/2014/main" id="{67EDC3AA-A979-0959-FD0B-E3E550CBDD0E}"/>
+              </a:ext>
+            </a:extLst>
+          </p:cNvPr>
+          <p:cNvSpPr/>
+          <p:nvPr/>
+        </p:nvSpPr>
+        <p:spPr>
+          <a:xfrm>
+            <a:off x="1804505" y="3814216"/>
             <a:ext cx="401275" cy="283833"/>
           </a:xfrm>
           <a:prstGeom prst="roundRect">
@@ -4282,10 +5546,10 @@
       </p:sp>
       <p:sp>
         <p:nvSpPr>
-          <p:cNvPr id="29" name="Rectangle: Rounded Corners 28">
-            <a:extLst>
-              <a:ext uri="{FF2B5EF4-FFF2-40B4-BE49-F238E27FC236}">
-                <a16:creationId xmlns:a16="http://schemas.microsoft.com/office/drawing/2014/main" id="{1E7FAB57-3C93-EE7F-12CC-2CE2ACFE26A3}"/>
+          <p:cNvPr id="107" name="Rectangle: Rounded Corners 106">
+            <a:extLst>
+              <a:ext uri="{FF2B5EF4-FFF2-40B4-BE49-F238E27FC236}">
+                <a16:creationId xmlns:a16="http://schemas.microsoft.com/office/drawing/2014/main" id="{F4671877-A512-C165-6C41-9B96A5A0678B}"/>
               </a:ext>
             </a:extLst>
           </p:cNvPr>
@@ -4294,64 +5558,14 @@
         </p:nvSpPr>
         <p:spPr>
           <a:xfrm>
-            <a:off x="386634" y="5384038"/>
-            <a:ext cx="1585519" cy="771787"/>
-          </a:xfrm>
-          <a:prstGeom prst="roundRect">
-            <a:avLst/>
-          </a:prstGeom>
-        </p:spPr>
-        <p:style>
-          <a:lnRef idx="2">
-            <a:schemeClr val="accent1">
-              <a:shade val="15000"/>
-            </a:schemeClr>
-          </a:lnRef>
-          <a:fillRef idx="1">
-            <a:schemeClr val="accent1"/>
-          </a:fillRef>
-          <a:effectRef idx="0">
-            <a:schemeClr val="accent1"/>
-          </a:effectRef>
-          <a:fontRef idx="minor">
-            <a:schemeClr val="lt1"/>
-          </a:fontRef>
-        </p:style>
-        <p:txBody>
-          <a:bodyPr rtlCol="0" anchor="ctr"/>
-          <a:lstStyle/>
-          <a:p>
-            <a:pPr algn="ctr"/>
-            <a:r>
-              <a:rPr lang="es-CL" dirty="0"/>
-              <a:t>Luz encendido 2</a:t>
-            </a:r>
-            <a:endParaRPr lang="en-US" dirty="0"/>
-          </a:p>
-        </p:txBody>
-      </p:sp>
-      <p:sp>
-        <p:nvSpPr>
-          <p:cNvPr id="30" name="Rectangle: Rounded Corners 29">
-            <a:extLst>
-              <a:ext uri="{FF2B5EF4-FFF2-40B4-BE49-F238E27FC236}">
-                <a16:creationId xmlns:a16="http://schemas.microsoft.com/office/drawing/2014/main" id="{58CE8E52-21D4-6855-433C-0D0B0E2EA050}"/>
-              </a:ext>
-            </a:extLst>
-          </p:cNvPr>
-          <p:cNvSpPr/>
-          <p:nvPr/>
-        </p:nvSpPr>
-        <p:spPr>
-          <a:xfrm>
-            <a:off x="1771515" y="5306144"/>
+            <a:off x="1866214" y="2730257"/>
             <a:ext cx="401275" cy="283833"/>
           </a:xfrm>
           <a:prstGeom prst="roundRect">
             <a:avLst/>
           </a:prstGeom>
           <a:solidFill>
-            <a:srgbClr val="FF0000"/>
+            <a:srgbClr val="7030A0"/>
           </a:solidFill>
         </p:spPr>
         <p:style>
@@ -4377,7 +5591,7 @@
             <a:pPr algn="ctr"/>
             <a:r>
               <a:rPr lang="es-CL" sz="1400" dirty="0"/>
-              <a:t>T5</a:t>
+              <a:t>T6</a:t>
             </a:r>
             <a:endParaRPr lang="en-US" sz="1400" dirty="0"/>
           </a:p>
@@ -4385,10 +5599,10 @@
       </p:sp>
       <p:sp>
         <p:nvSpPr>
-          <p:cNvPr id="31" name="Rectangle: Rounded Corners 30">
-            <a:extLst>
-              <a:ext uri="{FF2B5EF4-FFF2-40B4-BE49-F238E27FC236}">
-                <a16:creationId xmlns:a16="http://schemas.microsoft.com/office/drawing/2014/main" id="{7B2E9C9A-F312-8791-62C1-247F4BC60435}"/>
+          <p:cNvPr id="109" name="Rectangle: Rounded Corners 108">
+            <a:extLst>
+              <a:ext uri="{FF2B5EF4-FFF2-40B4-BE49-F238E27FC236}">
+                <a16:creationId xmlns:a16="http://schemas.microsoft.com/office/drawing/2014/main" id="{968C0D24-01F2-F7DF-D60A-770ABDF51038}"/>
               </a:ext>
             </a:extLst>
           </p:cNvPr>
@@ -4397,1682 +5611,7 @@
         </p:nvSpPr>
         <p:spPr>
           <a:xfrm>
-            <a:off x="2397141" y="3808584"/>
-            <a:ext cx="1585519" cy="771787"/>
-          </a:xfrm>
-          <a:prstGeom prst="roundRect">
-            <a:avLst/>
-          </a:prstGeom>
-        </p:spPr>
-        <p:style>
-          <a:lnRef idx="2">
-            <a:schemeClr val="accent1">
-              <a:shade val="15000"/>
-            </a:schemeClr>
-          </a:lnRef>
-          <a:fillRef idx="1">
-            <a:schemeClr val="accent1"/>
-          </a:fillRef>
-          <a:effectRef idx="0">
-            <a:schemeClr val="accent1"/>
-          </a:effectRef>
-          <a:fontRef idx="minor">
-            <a:schemeClr val="lt1"/>
-          </a:fontRef>
-        </p:style>
-        <p:txBody>
-          <a:bodyPr rtlCol="0" anchor="ctr"/>
-          <a:lstStyle/>
-          <a:p>
-            <a:pPr algn="ctr"/>
-            <a:r>
-              <a:rPr lang="es-CL" dirty="0"/>
-              <a:t>Generador de pulso</a:t>
-            </a:r>
-            <a:endParaRPr lang="en-US" dirty="0"/>
-          </a:p>
-        </p:txBody>
-      </p:sp>
-      <p:sp>
-        <p:nvSpPr>
-          <p:cNvPr id="32" name="Rectangle: Rounded Corners 31">
-            <a:extLst>
-              <a:ext uri="{FF2B5EF4-FFF2-40B4-BE49-F238E27FC236}">
-                <a16:creationId xmlns:a16="http://schemas.microsoft.com/office/drawing/2014/main" id="{27D835A2-6D8F-742A-DCA0-12326A5D0F65}"/>
-              </a:ext>
-            </a:extLst>
-          </p:cNvPr>
-          <p:cNvSpPr/>
-          <p:nvPr/>
-        </p:nvSpPr>
-        <p:spPr>
-          <a:xfrm>
-            <a:off x="3780807" y="3733688"/>
-            <a:ext cx="401275" cy="283833"/>
-          </a:xfrm>
-          <a:prstGeom prst="roundRect">
-            <a:avLst/>
-          </a:prstGeom>
-        </p:spPr>
-        <p:style>
-          <a:lnRef idx="2">
-            <a:schemeClr val="accent4">
-              <a:shade val="15000"/>
-            </a:schemeClr>
-          </a:lnRef>
-          <a:fillRef idx="1">
-            <a:schemeClr val="accent4"/>
-          </a:fillRef>
-          <a:effectRef idx="0">
-            <a:schemeClr val="accent4"/>
-          </a:effectRef>
-          <a:fontRef idx="minor">
-            <a:schemeClr val="lt1"/>
-          </a:fontRef>
-        </p:style>
-        <p:txBody>
-          <a:bodyPr rtlCol="0" anchor="ctr"/>
-          <a:lstStyle/>
-          <a:p>
-            <a:pPr algn="ctr"/>
-            <a:r>
-              <a:rPr lang="es-CL" sz="1400" dirty="0">
-                <a:ln w="0"/>
-                <a:solidFill>
-                  <a:schemeClr val="tx1"/>
-                </a:solidFill>
-                <a:effectLst>
-                  <a:outerShdw blurRad="38100" dist="19050" dir="2700000" algn="tl" rotWithShape="0">
-                    <a:schemeClr val="dk1">
-                      <a:alpha val="40000"/>
-                    </a:schemeClr>
-                  </a:outerShdw>
-                </a:effectLst>
-              </a:rPr>
-              <a:t>T3</a:t>
-            </a:r>
-            <a:endParaRPr lang="en-US" sz="1400" dirty="0">
-              <a:ln w="0"/>
-              <a:solidFill>
-                <a:schemeClr val="tx1"/>
-              </a:solidFill>
-              <a:effectLst>
-                <a:outerShdw blurRad="38100" dist="19050" dir="2700000" algn="tl" rotWithShape="0">
-                  <a:schemeClr val="dk1">
-                    <a:alpha val="40000"/>
-                  </a:schemeClr>
-                </a:outerShdw>
-              </a:effectLst>
-            </a:endParaRPr>
-          </a:p>
-        </p:txBody>
-      </p:sp>
-      <p:sp>
-        <p:nvSpPr>
-          <p:cNvPr id="33" name="Rectangle: Rounded Corners 32">
-            <a:extLst>
-              <a:ext uri="{FF2B5EF4-FFF2-40B4-BE49-F238E27FC236}">
-                <a16:creationId xmlns:a16="http://schemas.microsoft.com/office/drawing/2014/main" id="{43CB77D9-D19A-C62C-C80D-99A57312F0B0}"/>
-              </a:ext>
-            </a:extLst>
-          </p:cNvPr>
-          <p:cNvSpPr/>
-          <p:nvPr/>
-        </p:nvSpPr>
-        <p:spPr>
-          <a:xfrm>
-            <a:off x="6474527" y="3811683"/>
-            <a:ext cx="1585519" cy="771787"/>
-          </a:xfrm>
-          <a:prstGeom prst="roundRect">
-            <a:avLst/>
-          </a:prstGeom>
-        </p:spPr>
-        <p:style>
-          <a:lnRef idx="2">
-            <a:schemeClr val="accent1">
-              <a:shade val="15000"/>
-            </a:schemeClr>
-          </a:lnRef>
-          <a:fillRef idx="1">
-            <a:schemeClr val="accent1"/>
-          </a:fillRef>
-          <a:effectRef idx="0">
-            <a:schemeClr val="accent1"/>
-          </a:effectRef>
-          <a:fontRef idx="minor">
-            <a:schemeClr val="lt1"/>
-          </a:fontRef>
-        </p:style>
-        <p:txBody>
-          <a:bodyPr rtlCol="0" anchor="ctr"/>
-          <a:lstStyle/>
-          <a:p>
-            <a:pPr algn="ctr"/>
-            <a:r>
-              <a:rPr lang="es-CL" dirty="0"/>
-              <a:t>Multivibrador monoestable</a:t>
-            </a:r>
-            <a:r>
-              <a:rPr lang="es-CL" sz="1600" dirty="0"/>
-              <a:t>*</a:t>
-            </a:r>
-            <a:endParaRPr lang="en-US" dirty="0"/>
-          </a:p>
-        </p:txBody>
-      </p:sp>
-      <p:sp>
-        <p:nvSpPr>
-          <p:cNvPr id="35" name="Rectangle: Rounded Corners 34">
-            <a:extLst>
-              <a:ext uri="{FF2B5EF4-FFF2-40B4-BE49-F238E27FC236}">
-                <a16:creationId xmlns:a16="http://schemas.microsoft.com/office/drawing/2014/main" id="{0A5E6DB4-FC1F-4875-19AA-8454C94557E3}"/>
-              </a:ext>
-            </a:extLst>
-          </p:cNvPr>
-          <p:cNvSpPr/>
-          <p:nvPr/>
-        </p:nvSpPr>
-        <p:spPr>
-          <a:xfrm>
-            <a:off x="7720359" y="3669765"/>
-            <a:ext cx="401275" cy="283833"/>
-          </a:xfrm>
-          <a:prstGeom prst="roundRect">
-            <a:avLst/>
-          </a:prstGeom>
-          <a:solidFill>
-            <a:schemeClr val="bg1"/>
-          </a:solidFill>
-        </p:spPr>
-        <p:style>
-          <a:lnRef idx="2">
-            <a:schemeClr val="accent2">
-              <a:shade val="15000"/>
-            </a:schemeClr>
-          </a:lnRef>
-          <a:fillRef idx="1">
-            <a:schemeClr val="accent2"/>
-          </a:fillRef>
-          <a:effectRef idx="0">
-            <a:schemeClr val="accent2"/>
-          </a:effectRef>
-          <a:fontRef idx="minor">
-            <a:schemeClr val="lt1"/>
-          </a:fontRef>
-        </p:style>
-        <p:txBody>
-          <a:bodyPr rtlCol="0" anchor="ctr"/>
-          <a:lstStyle/>
-          <a:p>
-            <a:pPr algn="ctr"/>
-            <a:r>
-              <a:rPr lang="es-CL" sz="1400" dirty="0">
-                <a:solidFill>
-                  <a:schemeClr val="tx1"/>
-                </a:solidFill>
-              </a:rPr>
-              <a:t>T8</a:t>
-            </a:r>
-            <a:endParaRPr lang="en-US" sz="1400" dirty="0">
-              <a:solidFill>
-                <a:schemeClr val="tx1"/>
-              </a:solidFill>
-            </a:endParaRPr>
-          </a:p>
-        </p:txBody>
-      </p:sp>
-      <p:sp>
-        <p:nvSpPr>
-          <p:cNvPr id="36" name="Rectangle: Rounded Corners 35">
-            <a:extLst>
-              <a:ext uri="{FF2B5EF4-FFF2-40B4-BE49-F238E27FC236}">
-                <a16:creationId xmlns:a16="http://schemas.microsoft.com/office/drawing/2014/main" id="{37DB4407-5CB5-C41B-6CFD-63AFF4FE0B74}"/>
-              </a:ext>
-            </a:extLst>
-          </p:cNvPr>
-          <p:cNvSpPr/>
-          <p:nvPr/>
-        </p:nvSpPr>
-        <p:spPr>
-          <a:xfrm>
-            <a:off x="4374145" y="3869257"/>
-            <a:ext cx="1585519" cy="771787"/>
-          </a:xfrm>
-          <a:prstGeom prst="roundRect">
-            <a:avLst/>
-          </a:prstGeom>
-        </p:spPr>
-        <p:style>
-          <a:lnRef idx="2">
-            <a:schemeClr val="accent1">
-              <a:shade val="15000"/>
-            </a:schemeClr>
-          </a:lnRef>
-          <a:fillRef idx="1">
-            <a:schemeClr val="accent1"/>
-          </a:fillRef>
-          <a:effectRef idx="0">
-            <a:schemeClr val="accent1"/>
-          </a:effectRef>
-          <a:fontRef idx="minor">
-            <a:schemeClr val="lt1"/>
-          </a:fontRef>
-        </p:style>
-        <p:txBody>
-          <a:bodyPr rtlCol="0" anchor="ctr"/>
-          <a:lstStyle/>
-          <a:p>
-            <a:pPr algn="ctr"/>
-            <a:r>
-              <a:rPr lang="es-CL" dirty="0"/>
-              <a:t>Gatillo*</a:t>
-            </a:r>
-            <a:endParaRPr lang="en-US" dirty="0"/>
-          </a:p>
-        </p:txBody>
-      </p:sp>
-      <p:sp>
-        <p:nvSpPr>
-          <p:cNvPr id="39" name="Rectangle: Rounded Corners 38">
-            <a:extLst>
-              <a:ext uri="{FF2B5EF4-FFF2-40B4-BE49-F238E27FC236}">
-                <a16:creationId xmlns:a16="http://schemas.microsoft.com/office/drawing/2014/main" id="{899AC407-ACDF-BD75-B2E4-BA7EFA0C2E7A}"/>
-              </a:ext>
-            </a:extLst>
-          </p:cNvPr>
-          <p:cNvSpPr/>
-          <p:nvPr/>
-        </p:nvSpPr>
-        <p:spPr>
-          <a:xfrm>
-            <a:off x="5743356" y="3751797"/>
-            <a:ext cx="401275" cy="283833"/>
-          </a:xfrm>
-          <a:prstGeom prst="roundRect">
-            <a:avLst/>
-          </a:prstGeom>
-          <a:solidFill>
-            <a:srgbClr val="7030A0"/>
-          </a:solidFill>
-        </p:spPr>
-        <p:style>
-          <a:lnRef idx="2">
-            <a:schemeClr val="accent2">
-              <a:shade val="15000"/>
-            </a:schemeClr>
-          </a:lnRef>
-          <a:fillRef idx="1">
-            <a:schemeClr val="accent2"/>
-          </a:fillRef>
-          <a:effectRef idx="0">
-            <a:schemeClr val="accent2"/>
-          </a:effectRef>
-          <a:fontRef idx="minor">
-            <a:schemeClr val="lt1"/>
-          </a:fontRef>
-        </p:style>
-        <p:txBody>
-          <a:bodyPr rtlCol="0" anchor="ctr"/>
-          <a:lstStyle/>
-          <a:p>
-            <a:pPr algn="ctr"/>
-            <a:r>
-              <a:rPr lang="es-CL" sz="1400" dirty="0"/>
-              <a:t>T6</a:t>
-            </a:r>
-            <a:endParaRPr lang="en-US" sz="1400" dirty="0"/>
-          </a:p>
-        </p:txBody>
-      </p:sp>
-      <p:sp>
-        <p:nvSpPr>
-          <p:cNvPr id="43" name="Rectangle: Rounded Corners 42">
-            <a:extLst>
-              <a:ext uri="{FF2B5EF4-FFF2-40B4-BE49-F238E27FC236}">
-                <a16:creationId xmlns:a16="http://schemas.microsoft.com/office/drawing/2014/main" id="{713CB9BC-FCDC-4AD3-EDC1-53E2BA36F115}"/>
-              </a:ext>
-            </a:extLst>
-          </p:cNvPr>
-          <p:cNvSpPr/>
-          <p:nvPr/>
-        </p:nvSpPr>
-        <p:spPr>
-          <a:xfrm>
-            <a:off x="8762606" y="3893714"/>
-            <a:ext cx="1585519" cy="771787"/>
-          </a:xfrm>
-          <a:prstGeom prst="roundRect">
-            <a:avLst/>
-          </a:prstGeom>
-        </p:spPr>
-        <p:style>
-          <a:lnRef idx="2">
-            <a:schemeClr val="accent1">
-              <a:shade val="15000"/>
-            </a:schemeClr>
-          </a:lnRef>
-          <a:fillRef idx="1">
-            <a:schemeClr val="accent1"/>
-          </a:fillRef>
-          <a:effectRef idx="0">
-            <a:schemeClr val="accent1"/>
-          </a:effectRef>
-          <a:fontRef idx="minor">
-            <a:schemeClr val="lt1"/>
-          </a:fontRef>
-        </p:style>
-        <p:txBody>
-          <a:bodyPr rtlCol="0" anchor="ctr"/>
-          <a:lstStyle/>
-          <a:p>
-            <a:pPr algn="ctr"/>
-            <a:r>
-              <a:rPr lang="es-CL" dirty="0"/>
-              <a:t>Filtro 2</a:t>
-            </a:r>
-            <a:endParaRPr lang="en-US" dirty="0"/>
-          </a:p>
-        </p:txBody>
-      </p:sp>
-      <p:sp>
-        <p:nvSpPr>
-          <p:cNvPr id="45" name="Rectangle: Rounded Corners 44">
-            <a:extLst>
-              <a:ext uri="{FF2B5EF4-FFF2-40B4-BE49-F238E27FC236}">
-                <a16:creationId xmlns:a16="http://schemas.microsoft.com/office/drawing/2014/main" id="{C3C7289F-DDEF-BCB0-8C49-68DE923E5EAD}"/>
-              </a:ext>
-            </a:extLst>
-          </p:cNvPr>
-          <p:cNvSpPr/>
-          <p:nvPr/>
-        </p:nvSpPr>
-        <p:spPr>
-          <a:xfrm>
-            <a:off x="9176274" y="5306144"/>
-            <a:ext cx="1585519" cy="771787"/>
-          </a:xfrm>
-          <a:prstGeom prst="roundRect">
-            <a:avLst/>
-          </a:prstGeom>
-        </p:spPr>
-        <p:style>
-          <a:lnRef idx="2">
-            <a:schemeClr val="accent1">
-              <a:shade val="15000"/>
-            </a:schemeClr>
-          </a:lnRef>
-          <a:fillRef idx="1">
-            <a:schemeClr val="accent1"/>
-          </a:fillRef>
-          <a:effectRef idx="0">
-            <a:schemeClr val="accent1"/>
-          </a:effectRef>
-          <a:fontRef idx="minor">
-            <a:schemeClr val="lt1"/>
-          </a:fontRef>
-        </p:style>
-        <p:txBody>
-          <a:bodyPr rtlCol="0" anchor="ctr"/>
-          <a:lstStyle/>
-          <a:p>
-            <a:pPr algn="ctr"/>
-            <a:r>
-              <a:rPr lang="es-CL" dirty="0"/>
-              <a:t>Indicador de pulso</a:t>
-            </a:r>
-            <a:endParaRPr lang="en-US" dirty="0"/>
-          </a:p>
-        </p:txBody>
-      </p:sp>
-      <p:sp>
-        <p:nvSpPr>
-          <p:cNvPr id="46" name="Rectangle: Rounded Corners 45">
-            <a:extLst>
-              <a:ext uri="{FF2B5EF4-FFF2-40B4-BE49-F238E27FC236}">
-                <a16:creationId xmlns:a16="http://schemas.microsoft.com/office/drawing/2014/main" id="{C6FA60A8-AA44-D90F-B94E-5BC046886A2A}"/>
-              </a:ext>
-            </a:extLst>
-          </p:cNvPr>
-          <p:cNvSpPr/>
-          <p:nvPr/>
-        </p:nvSpPr>
-        <p:spPr>
-          <a:xfrm>
-            <a:off x="10561155" y="5228250"/>
-            <a:ext cx="401275" cy="283833"/>
-          </a:xfrm>
-          <a:prstGeom prst="roundRect">
-            <a:avLst/>
-          </a:prstGeom>
-          <a:solidFill>
-            <a:srgbClr val="FF0000"/>
-          </a:solidFill>
-        </p:spPr>
-        <p:style>
-          <a:lnRef idx="2">
-            <a:schemeClr val="accent2">
-              <a:shade val="15000"/>
-            </a:schemeClr>
-          </a:lnRef>
-          <a:fillRef idx="1">
-            <a:schemeClr val="accent2"/>
-          </a:fillRef>
-          <a:effectRef idx="0">
-            <a:schemeClr val="accent2"/>
-          </a:effectRef>
-          <a:fontRef idx="minor">
-            <a:schemeClr val="lt1"/>
-          </a:fontRef>
-        </p:style>
-        <p:txBody>
-          <a:bodyPr rtlCol="0" anchor="ctr"/>
-          <a:lstStyle/>
-          <a:p>
-            <a:pPr algn="ctr"/>
-            <a:r>
-              <a:rPr lang="es-CL" sz="1400" dirty="0"/>
-              <a:t>T5</a:t>
-            </a:r>
-            <a:endParaRPr lang="en-US" sz="1400" dirty="0"/>
-          </a:p>
-        </p:txBody>
-      </p:sp>
-      <p:sp>
-        <p:nvSpPr>
-          <p:cNvPr id="47" name="Rectangle: Rounded Corners 46">
-            <a:extLst>
-              <a:ext uri="{FF2B5EF4-FFF2-40B4-BE49-F238E27FC236}">
-                <a16:creationId xmlns:a16="http://schemas.microsoft.com/office/drawing/2014/main" id="{177376A7-58C6-ECB3-0971-09E63FFB3288}"/>
-              </a:ext>
-            </a:extLst>
-          </p:cNvPr>
-          <p:cNvSpPr/>
-          <p:nvPr/>
-        </p:nvSpPr>
-        <p:spPr>
-          <a:xfrm>
-            <a:off x="7012118" y="5306144"/>
-            <a:ext cx="1585519" cy="771787"/>
-          </a:xfrm>
-          <a:prstGeom prst="roundRect">
-            <a:avLst/>
-          </a:prstGeom>
-        </p:spPr>
-        <p:style>
-          <a:lnRef idx="2">
-            <a:schemeClr val="accent1">
-              <a:shade val="15000"/>
-            </a:schemeClr>
-          </a:lnRef>
-          <a:fillRef idx="1">
-            <a:schemeClr val="accent1"/>
-          </a:fillRef>
-          <a:effectRef idx="0">
-            <a:schemeClr val="accent1"/>
-          </a:effectRef>
-          <a:fontRef idx="minor">
-            <a:schemeClr val="lt1"/>
-          </a:fontRef>
-        </p:style>
-        <p:txBody>
-          <a:bodyPr rtlCol="0" anchor="ctr"/>
-          <a:lstStyle/>
-          <a:p>
-            <a:pPr algn="ctr"/>
-            <a:r>
-              <a:rPr lang="es-CL" dirty="0"/>
-              <a:t>Driver*</a:t>
-            </a:r>
-            <a:endParaRPr lang="en-US" dirty="0"/>
-          </a:p>
-        </p:txBody>
-      </p:sp>
-      <p:sp>
-        <p:nvSpPr>
-          <p:cNvPr id="48" name="Rectangle: Rounded Corners 47">
-            <a:extLst>
-              <a:ext uri="{FF2B5EF4-FFF2-40B4-BE49-F238E27FC236}">
-                <a16:creationId xmlns:a16="http://schemas.microsoft.com/office/drawing/2014/main" id="{19F4B2FE-CE31-5208-4799-104527E594FF}"/>
-              </a:ext>
-            </a:extLst>
-          </p:cNvPr>
-          <p:cNvSpPr/>
-          <p:nvPr/>
-        </p:nvSpPr>
-        <p:spPr>
-          <a:xfrm>
-            <a:off x="8381329" y="5188684"/>
-            <a:ext cx="401275" cy="283833"/>
-          </a:xfrm>
-          <a:prstGeom prst="roundRect">
-            <a:avLst/>
-          </a:prstGeom>
-          <a:solidFill>
-            <a:srgbClr val="7030A0"/>
-          </a:solidFill>
-        </p:spPr>
-        <p:style>
-          <a:lnRef idx="2">
-            <a:schemeClr val="accent2">
-              <a:shade val="15000"/>
-            </a:schemeClr>
-          </a:lnRef>
-          <a:fillRef idx="1">
-            <a:schemeClr val="accent2"/>
-          </a:fillRef>
-          <a:effectRef idx="0">
-            <a:schemeClr val="accent2"/>
-          </a:effectRef>
-          <a:fontRef idx="minor">
-            <a:schemeClr val="lt1"/>
-          </a:fontRef>
-        </p:style>
-        <p:txBody>
-          <a:bodyPr rtlCol="0" anchor="ctr"/>
-          <a:lstStyle/>
-          <a:p>
-            <a:pPr algn="ctr"/>
-            <a:r>
-              <a:rPr lang="es-CL" sz="1400" dirty="0"/>
-              <a:t>T6</a:t>
-            </a:r>
-            <a:endParaRPr lang="en-US" sz="1400" dirty="0"/>
-          </a:p>
-        </p:txBody>
-      </p:sp>
-      <p:sp>
-        <p:nvSpPr>
-          <p:cNvPr id="50" name="Rectangle: Beveled 49">
-            <a:extLst>
-              <a:ext uri="{FF2B5EF4-FFF2-40B4-BE49-F238E27FC236}">
-                <a16:creationId xmlns:a16="http://schemas.microsoft.com/office/drawing/2014/main" id="{9052F626-9CB7-CDC7-A1C5-6266D49CD7AA}"/>
-              </a:ext>
-            </a:extLst>
-          </p:cNvPr>
-          <p:cNvSpPr/>
-          <p:nvPr/>
-        </p:nvSpPr>
-        <p:spPr>
-          <a:xfrm>
-            <a:off x="10761793" y="4007261"/>
-            <a:ext cx="1299219" cy="562850"/>
-          </a:xfrm>
-          <a:prstGeom prst="bevel">
-            <a:avLst/>
-          </a:prstGeom>
-        </p:spPr>
-        <p:style>
-          <a:lnRef idx="2">
-            <a:schemeClr val="accent1">
-              <a:shade val="15000"/>
-            </a:schemeClr>
-          </a:lnRef>
-          <a:fillRef idx="1">
-            <a:schemeClr val="accent1"/>
-          </a:fillRef>
-          <a:effectRef idx="0">
-            <a:schemeClr val="accent1"/>
-          </a:effectRef>
-          <a:fontRef idx="minor">
-            <a:schemeClr val="lt1"/>
-          </a:fontRef>
-        </p:style>
-        <p:txBody>
-          <a:bodyPr rtlCol="0" anchor="ctr"/>
-          <a:lstStyle/>
-          <a:p>
-            <a:pPr algn="ctr"/>
-            <a:r>
-              <a:rPr lang="en-US" dirty="0"/>
-              <a:t>display</a:t>
-            </a:r>
-          </a:p>
-        </p:txBody>
-      </p:sp>
-      <p:cxnSp>
-        <p:nvCxnSpPr>
-          <p:cNvPr id="52" name="Straight Arrow Connector 51">
-            <a:extLst>
-              <a:ext uri="{FF2B5EF4-FFF2-40B4-BE49-F238E27FC236}">
-                <a16:creationId xmlns:a16="http://schemas.microsoft.com/office/drawing/2014/main" id="{33887707-1F88-71EB-8350-C1BA9C7FF998}"/>
-              </a:ext>
-            </a:extLst>
-          </p:cNvPr>
-          <p:cNvCxnSpPr>
-            <a:stCxn id="20" idx="3"/>
-            <a:endCxn id="22" idx="1"/>
-          </p:cNvCxnSpPr>
-          <p:nvPr/>
-        </p:nvCxnSpPr>
-        <p:spPr>
-          <a:xfrm flipV="1">
-            <a:off x="2064284" y="1017295"/>
-            <a:ext cx="437027" cy="1"/>
-          </a:xfrm>
-          <a:prstGeom prst="straightConnector1">
-            <a:avLst/>
-          </a:prstGeom>
-          <a:ln>
-            <a:tailEnd type="triangle"/>
-          </a:ln>
-        </p:spPr>
-        <p:style>
-          <a:lnRef idx="1">
-            <a:schemeClr val="accent1"/>
-          </a:lnRef>
-          <a:fillRef idx="0">
-            <a:schemeClr val="accent1"/>
-          </a:fillRef>
-          <a:effectRef idx="0">
-            <a:schemeClr val="accent1"/>
-          </a:effectRef>
-          <a:fontRef idx="minor">
-            <a:schemeClr val="tx1"/>
-          </a:fontRef>
-        </p:style>
-      </p:cxnSp>
-      <p:cxnSp>
-        <p:nvCxnSpPr>
-          <p:cNvPr id="54" name="Straight Arrow Connector 53">
-            <a:extLst>
-              <a:ext uri="{FF2B5EF4-FFF2-40B4-BE49-F238E27FC236}">
-                <a16:creationId xmlns:a16="http://schemas.microsoft.com/office/drawing/2014/main" id="{102A8F7C-8151-7F2F-BB1A-0B9FC5E5B649}"/>
-              </a:ext>
-            </a:extLst>
-          </p:cNvPr>
-          <p:cNvCxnSpPr>
-            <a:stCxn id="22" idx="3"/>
-            <a:endCxn id="24" idx="1"/>
-          </p:cNvCxnSpPr>
-          <p:nvPr/>
-        </p:nvCxnSpPr>
-        <p:spPr>
-          <a:xfrm>
-            <a:off x="4086830" y="1017295"/>
-            <a:ext cx="526303" cy="0"/>
-          </a:xfrm>
-          <a:prstGeom prst="straightConnector1">
-            <a:avLst/>
-          </a:prstGeom>
-          <a:ln>
-            <a:tailEnd type="triangle"/>
-          </a:ln>
-        </p:spPr>
-        <p:style>
-          <a:lnRef idx="1">
-            <a:schemeClr val="accent1"/>
-          </a:lnRef>
-          <a:fillRef idx="0">
-            <a:schemeClr val="accent1"/>
-          </a:fillRef>
-          <a:effectRef idx="0">
-            <a:schemeClr val="accent1"/>
-          </a:effectRef>
-          <a:fontRef idx="minor">
-            <a:schemeClr val="tx1"/>
-          </a:fontRef>
-        </p:style>
-      </p:cxnSp>
-      <p:cxnSp>
-        <p:nvCxnSpPr>
-          <p:cNvPr id="58" name="Straight Arrow Connector 57">
-            <a:extLst>
-              <a:ext uri="{FF2B5EF4-FFF2-40B4-BE49-F238E27FC236}">
-                <a16:creationId xmlns:a16="http://schemas.microsoft.com/office/drawing/2014/main" id="{D8E2C7C4-D7C6-C282-2BF3-A511563B2D3B}"/>
-              </a:ext>
-            </a:extLst>
-          </p:cNvPr>
-          <p:cNvCxnSpPr>
-            <a:stCxn id="4" idx="3"/>
-            <a:endCxn id="6" idx="1"/>
-          </p:cNvCxnSpPr>
-          <p:nvPr/>
-        </p:nvCxnSpPr>
-        <p:spPr>
-          <a:xfrm>
-            <a:off x="1919549" y="2667033"/>
-            <a:ext cx="581763" cy="6750"/>
-          </a:xfrm>
-          <a:prstGeom prst="straightConnector1">
-            <a:avLst/>
-          </a:prstGeom>
-          <a:ln>
-            <a:tailEnd type="triangle"/>
-          </a:ln>
-        </p:spPr>
-        <p:style>
-          <a:lnRef idx="1">
-            <a:schemeClr val="accent1"/>
-          </a:lnRef>
-          <a:fillRef idx="0">
-            <a:schemeClr val="accent1"/>
-          </a:fillRef>
-          <a:effectRef idx="0">
-            <a:schemeClr val="accent1"/>
-          </a:effectRef>
-          <a:fontRef idx="minor">
-            <a:schemeClr val="tx1"/>
-          </a:fontRef>
-        </p:style>
-      </p:cxnSp>
-      <p:cxnSp>
-        <p:nvCxnSpPr>
-          <p:cNvPr id="65" name="Straight Arrow Connector 64">
-            <a:extLst>
-              <a:ext uri="{FF2B5EF4-FFF2-40B4-BE49-F238E27FC236}">
-                <a16:creationId xmlns:a16="http://schemas.microsoft.com/office/drawing/2014/main" id="{04A67265-28E3-9117-01B2-966C2F0EE7EC}"/>
-              </a:ext>
-            </a:extLst>
-          </p:cNvPr>
-          <p:cNvCxnSpPr>
-            <a:stCxn id="6" idx="3"/>
-            <a:endCxn id="8" idx="1"/>
-          </p:cNvCxnSpPr>
-          <p:nvPr/>
-        </p:nvCxnSpPr>
-        <p:spPr>
-          <a:xfrm>
-            <a:off x="4086831" y="2673783"/>
-            <a:ext cx="592121" cy="0"/>
-          </a:xfrm>
-          <a:prstGeom prst="straightConnector1">
-            <a:avLst/>
-          </a:prstGeom>
-          <a:ln>
-            <a:tailEnd type="triangle"/>
-          </a:ln>
-        </p:spPr>
-        <p:style>
-          <a:lnRef idx="1">
-            <a:schemeClr val="accent1"/>
-          </a:lnRef>
-          <a:fillRef idx="0">
-            <a:schemeClr val="accent1"/>
-          </a:fillRef>
-          <a:effectRef idx="0">
-            <a:schemeClr val="accent1"/>
-          </a:effectRef>
-          <a:fontRef idx="minor">
-            <a:schemeClr val="tx1"/>
-          </a:fontRef>
-        </p:style>
-      </p:cxnSp>
-      <p:cxnSp>
-        <p:nvCxnSpPr>
-          <p:cNvPr id="70" name="Straight Arrow Connector 69">
-            <a:extLst>
-              <a:ext uri="{FF2B5EF4-FFF2-40B4-BE49-F238E27FC236}">
-                <a16:creationId xmlns:a16="http://schemas.microsoft.com/office/drawing/2014/main" id="{C01726BA-422E-279A-69CF-B4E447A97AE0}"/>
-              </a:ext>
-            </a:extLst>
-          </p:cNvPr>
-          <p:cNvCxnSpPr>
-            <a:stCxn id="8" idx="3"/>
-            <a:endCxn id="10" idx="1"/>
-          </p:cNvCxnSpPr>
-          <p:nvPr/>
-        </p:nvCxnSpPr>
-        <p:spPr>
-          <a:xfrm>
-            <a:off x="6264471" y="2673783"/>
-            <a:ext cx="790273" cy="0"/>
-          </a:xfrm>
-          <a:prstGeom prst="straightConnector1">
-            <a:avLst/>
-          </a:prstGeom>
-          <a:ln>
-            <a:tailEnd type="triangle"/>
-          </a:ln>
-        </p:spPr>
-        <p:style>
-          <a:lnRef idx="1">
-            <a:schemeClr val="accent1"/>
-          </a:lnRef>
-          <a:fillRef idx="0">
-            <a:schemeClr val="accent1"/>
-          </a:fillRef>
-          <a:effectRef idx="0">
-            <a:schemeClr val="accent1"/>
-          </a:effectRef>
-          <a:fontRef idx="minor">
-            <a:schemeClr val="tx1"/>
-          </a:fontRef>
-        </p:style>
-      </p:cxnSp>
-      <p:cxnSp>
-        <p:nvCxnSpPr>
-          <p:cNvPr id="74" name="Straight Arrow Connector 73">
-            <a:extLst>
-              <a:ext uri="{FF2B5EF4-FFF2-40B4-BE49-F238E27FC236}">
-                <a16:creationId xmlns:a16="http://schemas.microsoft.com/office/drawing/2014/main" id="{AB15680B-71F1-C2A6-3505-0D69A13B23A9}"/>
-              </a:ext>
-            </a:extLst>
-          </p:cNvPr>
-          <p:cNvCxnSpPr>
-            <a:stCxn id="10" idx="3"/>
-            <a:endCxn id="11" idx="1"/>
-          </p:cNvCxnSpPr>
-          <p:nvPr/>
-        </p:nvCxnSpPr>
-        <p:spPr>
-          <a:xfrm>
-            <a:off x="8640263" y="2673783"/>
-            <a:ext cx="631263" cy="0"/>
-          </a:xfrm>
-          <a:prstGeom prst="straightConnector1">
-            <a:avLst/>
-          </a:prstGeom>
-          <a:ln>
-            <a:tailEnd type="triangle"/>
-          </a:ln>
-        </p:spPr>
-        <p:style>
-          <a:lnRef idx="1">
-            <a:schemeClr val="accent1"/>
-          </a:lnRef>
-          <a:fillRef idx="0">
-            <a:schemeClr val="accent1"/>
-          </a:fillRef>
-          <a:effectRef idx="0">
-            <a:schemeClr val="accent1"/>
-          </a:effectRef>
-          <a:fontRef idx="minor">
-            <a:schemeClr val="tx1"/>
-          </a:fontRef>
-        </p:style>
-      </p:cxnSp>
-      <p:cxnSp>
-        <p:nvCxnSpPr>
-          <p:cNvPr id="78" name="Connector: Elbow 77">
-            <a:extLst>
-              <a:ext uri="{FF2B5EF4-FFF2-40B4-BE49-F238E27FC236}">
-                <a16:creationId xmlns:a16="http://schemas.microsoft.com/office/drawing/2014/main" id="{EFFACA3D-E864-13DD-8B8E-3E78B75A3AF3}"/>
-              </a:ext>
-            </a:extLst>
-          </p:cNvPr>
-          <p:cNvCxnSpPr>
-            <a:stCxn id="10" idx="2"/>
-            <a:endCxn id="14" idx="0"/>
-          </p:cNvCxnSpPr>
-          <p:nvPr/>
-        </p:nvCxnSpPr>
-        <p:spPr>
-          <a:xfrm rot="5400000">
-            <a:off x="4107343" y="64913"/>
-            <a:ext cx="745399" cy="6734925"/>
-          </a:xfrm>
-          <a:prstGeom prst="bentConnector3">
-            <a:avLst/>
-          </a:prstGeom>
-          <a:ln>
-            <a:tailEnd type="triangle"/>
-          </a:ln>
-        </p:spPr>
-        <p:style>
-          <a:lnRef idx="1">
-            <a:schemeClr val="accent1"/>
-          </a:lnRef>
-          <a:fillRef idx="0">
-            <a:schemeClr val="accent1"/>
-          </a:fillRef>
-          <a:effectRef idx="0">
-            <a:schemeClr val="accent1"/>
-          </a:effectRef>
-          <a:fontRef idx="minor">
-            <a:schemeClr val="tx1"/>
-          </a:fontRef>
-        </p:style>
-      </p:cxnSp>
-      <p:cxnSp>
-        <p:nvCxnSpPr>
-          <p:cNvPr id="81" name="Straight Arrow Connector 80">
-            <a:extLst>
-              <a:ext uri="{FF2B5EF4-FFF2-40B4-BE49-F238E27FC236}">
-                <a16:creationId xmlns:a16="http://schemas.microsoft.com/office/drawing/2014/main" id="{D8A89719-D02A-0AE4-4196-952E17D2B7C5}"/>
-              </a:ext>
-            </a:extLst>
-          </p:cNvPr>
-          <p:cNvCxnSpPr>
-            <a:stCxn id="14" idx="3"/>
-            <a:endCxn id="31" idx="1"/>
-          </p:cNvCxnSpPr>
-          <p:nvPr/>
-        </p:nvCxnSpPr>
-        <p:spPr>
-          <a:xfrm>
-            <a:off x="1905338" y="4190969"/>
-            <a:ext cx="491803" cy="3509"/>
-          </a:xfrm>
-          <a:prstGeom prst="straightConnector1">
-            <a:avLst/>
-          </a:prstGeom>
-          <a:ln>
-            <a:tailEnd type="triangle"/>
-          </a:ln>
-        </p:spPr>
-        <p:style>
-          <a:lnRef idx="1">
-            <a:schemeClr val="accent1"/>
-          </a:lnRef>
-          <a:fillRef idx="0">
-            <a:schemeClr val="accent1"/>
-          </a:fillRef>
-          <a:effectRef idx="0">
-            <a:schemeClr val="accent1"/>
-          </a:effectRef>
-          <a:fontRef idx="minor">
-            <a:schemeClr val="tx1"/>
-          </a:fontRef>
-        </p:style>
-      </p:cxnSp>
-      <p:cxnSp>
-        <p:nvCxnSpPr>
-          <p:cNvPr id="83" name="Straight Arrow Connector 82">
-            <a:extLst>
-              <a:ext uri="{FF2B5EF4-FFF2-40B4-BE49-F238E27FC236}">
-                <a16:creationId xmlns:a16="http://schemas.microsoft.com/office/drawing/2014/main" id="{598CEBC4-8AA1-8190-EEA1-59E402D4C8F2}"/>
-              </a:ext>
-            </a:extLst>
-          </p:cNvPr>
-          <p:cNvCxnSpPr>
-            <a:stCxn id="31" idx="3"/>
-            <a:endCxn id="36" idx="1"/>
-          </p:cNvCxnSpPr>
-          <p:nvPr/>
-        </p:nvCxnSpPr>
-        <p:spPr>
-          <a:xfrm>
-            <a:off x="3982660" y="4194478"/>
-            <a:ext cx="391485" cy="60673"/>
-          </a:xfrm>
-          <a:prstGeom prst="straightConnector1">
-            <a:avLst/>
-          </a:prstGeom>
-          <a:ln>
-            <a:tailEnd type="triangle"/>
-          </a:ln>
-        </p:spPr>
-        <p:style>
-          <a:lnRef idx="1">
-            <a:schemeClr val="accent1"/>
-          </a:lnRef>
-          <a:fillRef idx="0">
-            <a:schemeClr val="accent1"/>
-          </a:fillRef>
-          <a:effectRef idx="0">
-            <a:schemeClr val="accent1"/>
-          </a:effectRef>
-          <a:fontRef idx="minor">
-            <a:schemeClr val="tx1"/>
-          </a:fontRef>
-        </p:style>
-      </p:cxnSp>
-      <p:cxnSp>
-        <p:nvCxnSpPr>
-          <p:cNvPr id="86" name="Straight Arrow Connector 85">
-            <a:extLst>
-              <a:ext uri="{FF2B5EF4-FFF2-40B4-BE49-F238E27FC236}">
-                <a16:creationId xmlns:a16="http://schemas.microsoft.com/office/drawing/2014/main" id="{8EE68B85-C286-F5BD-8DF3-4B963B206D4C}"/>
-              </a:ext>
-            </a:extLst>
-          </p:cNvPr>
-          <p:cNvCxnSpPr>
-            <a:stCxn id="36" idx="3"/>
-            <a:endCxn id="33" idx="1"/>
-          </p:cNvCxnSpPr>
-          <p:nvPr/>
-        </p:nvCxnSpPr>
-        <p:spPr>
-          <a:xfrm flipV="1">
-            <a:off x="5959664" y="4197577"/>
-            <a:ext cx="514863" cy="57574"/>
-          </a:xfrm>
-          <a:prstGeom prst="straightConnector1">
-            <a:avLst/>
-          </a:prstGeom>
-          <a:ln>
-            <a:tailEnd type="triangle"/>
-          </a:ln>
-        </p:spPr>
-        <p:style>
-          <a:lnRef idx="1">
-            <a:schemeClr val="accent1"/>
-          </a:lnRef>
-          <a:fillRef idx="0">
-            <a:schemeClr val="accent1"/>
-          </a:fillRef>
-          <a:effectRef idx="0">
-            <a:schemeClr val="accent1"/>
-          </a:effectRef>
-          <a:fontRef idx="minor">
-            <a:schemeClr val="tx1"/>
-          </a:fontRef>
-        </p:style>
-      </p:cxnSp>
-      <p:cxnSp>
-        <p:nvCxnSpPr>
-          <p:cNvPr id="88" name="Straight Arrow Connector 87">
-            <a:extLst>
-              <a:ext uri="{FF2B5EF4-FFF2-40B4-BE49-F238E27FC236}">
-                <a16:creationId xmlns:a16="http://schemas.microsoft.com/office/drawing/2014/main" id="{C344DD65-9614-3EC2-1FBF-0A8B97C299EF}"/>
-              </a:ext>
-            </a:extLst>
-          </p:cNvPr>
-          <p:cNvCxnSpPr>
-            <a:stCxn id="33" idx="3"/>
-            <a:endCxn id="43" idx="1"/>
-          </p:cNvCxnSpPr>
-          <p:nvPr/>
-        </p:nvCxnSpPr>
-        <p:spPr>
-          <a:xfrm>
-            <a:off x="8060046" y="4197577"/>
-            <a:ext cx="702560" cy="82031"/>
-          </a:xfrm>
-          <a:prstGeom prst="straightConnector1">
-            <a:avLst/>
-          </a:prstGeom>
-          <a:ln>
-            <a:tailEnd type="triangle"/>
-          </a:ln>
-        </p:spPr>
-        <p:style>
-          <a:lnRef idx="1">
-            <a:schemeClr val="accent1"/>
-          </a:lnRef>
-          <a:fillRef idx="0">
-            <a:schemeClr val="accent1"/>
-          </a:fillRef>
-          <a:effectRef idx="0">
-            <a:schemeClr val="accent1"/>
-          </a:effectRef>
-          <a:fontRef idx="minor">
-            <a:schemeClr val="tx1"/>
-          </a:fontRef>
-        </p:style>
-      </p:cxnSp>
-      <p:cxnSp>
-        <p:nvCxnSpPr>
-          <p:cNvPr id="90" name="Straight Arrow Connector 89">
-            <a:extLst>
-              <a:ext uri="{FF2B5EF4-FFF2-40B4-BE49-F238E27FC236}">
-                <a16:creationId xmlns:a16="http://schemas.microsoft.com/office/drawing/2014/main" id="{928B4B2F-AA97-8A52-AF9C-E01ACF077C57}"/>
-              </a:ext>
-            </a:extLst>
-          </p:cNvPr>
-          <p:cNvCxnSpPr>
-            <a:stCxn id="43" idx="3"/>
-            <a:endCxn id="50" idx="4"/>
-          </p:cNvCxnSpPr>
-          <p:nvPr/>
-        </p:nvCxnSpPr>
-        <p:spPr>
-          <a:xfrm>
-            <a:off x="10348125" y="4279608"/>
-            <a:ext cx="413668" cy="9078"/>
-          </a:xfrm>
-          <a:prstGeom prst="straightConnector1">
-            <a:avLst/>
-          </a:prstGeom>
-          <a:ln>
-            <a:tailEnd type="triangle"/>
-          </a:ln>
-        </p:spPr>
-        <p:style>
-          <a:lnRef idx="1">
-            <a:schemeClr val="accent1"/>
-          </a:lnRef>
-          <a:fillRef idx="0">
-            <a:schemeClr val="accent1"/>
-          </a:fillRef>
-          <a:effectRef idx="0">
-            <a:schemeClr val="accent1"/>
-          </a:effectRef>
-          <a:fontRef idx="minor">
-            <a:schemeClr val="tx1"/>
-          </a:fontRef>
-        </p:style>
-      </p:cxnSp>
-      <p:cxnSp>
-        <p:nvCxnSpPr>
-          <p:cNvPr id="92" name="Straight Arrow Connector 91">
-            <a:extLst>
-              <a:ext uri="{FF2B5EF4-FFF2-40B4-BE49-F238E27FC236}">
-                <a16:creationId xmlns:a16="http://schemas.microsoft.com/office/drawing/2014/main" id="{79EB56CB-B817-C3A7-F49C-E49335A8AC1F}"/>
-              </a:ext>
-            </a:extLst>
-          </p:cNvPr>
-          <p:cNvCxnSpPr>
-            <a:stCxn id="33" idx="2"/>
-            <a:endCxn id="47" idx="0"/>
-          </p:cNvCxnSpPr>
-          <p:nvPr/>
-        </p:nvCxnSpPr>
-        <p:spPr>
-          <a:xfrm>
-            <a:off x="7267287" y="4583470"/>
-            <a:ext cx="537591" cy="722674"/>
-          </a:xfrm>
-          <a:prstGeom prst="straightConnector1">
-            <a:avLst/>
-          </a:prstGeom>
-          <a:ln>
-            <a:tailEnd type="triangle"/>
-          </a:ln>
-        </p:spPr>
-        <p:style>
-          <a:lnRef idx="1">
-            <a:schemeClr val="accent1"/>
-          </a:lnRef>
-          <a:fillRef idx="0">
-            <a:schemeClr val="accent1"/>
-          </a:fillRef>
-          <a:effectRef idx="0">
-            <a:schemeClr val="accent1"/>
-          </a:effectRef>
-          <a:fontRef idx="minor">
-            <a:schemeClr val="tx1"/>
-          </a:fontRef>
-        </p:style>
-      </p:cxnSp>
-      <p:cxnSp>
-        <p:nvCxnSpPr>
-          <p:cNvPr id="95" name="Straight Arrow Connector 94">
-            <a:extLst>
-              <a:ext uri="{FF2B5EF4-FFF2-40B4-BE49-F238E27FC236}">
-                <a16:creationId xmlns:a16="http://schemas.microsoft.com/office/drawing/2014/main" id="{88E8B1B4-96D5-C8D4-A9A4-4E70B4407320}"/>
-              </a:ext>
-            </a:extLst>
-          </p:cNvPr>
-          <p:cNvCxnSpPr>
-            <a:stCxn id="47" idx="3"/>
-            <a:endCxn id="45" idx="1"/>
-          </p:cNvCxnSpPr>
-          <p:nvPr/>
-        </p:nvCxnSpPr>
-        <p:spPr>
-          <a:xfrm>
-            <a:off x="8597637" y="5692038"/>
-            <a:ext cx="578637" cy="0"/>
-          </a:xfrm>
-          <a:prstGeom prst="straightConnector1">
-            <a:avLst/>
-          </a:prstGeom>
-          <a:ln>
-            <a:tailEnd type="triangle"/>
-          </a:ln>
-        </p:spPr>
-        <p:style>
-          <a:lnRef idx="1">
-            <a:schemeClr val="accent1"/>
-          </a:lnRef>
-          <a:fillRef idx="0">
-            <a:schemeClr val="accent1"/>
-          </a:fillRef>
-          <a:effectRef idx="0">
-            <a:schemeClr val="accent1"/>
-          </a:effectRef>
-          <a:fontRef idx="minor">
-            <a:schemeClr val="tx1"/>
-          </a:fontRef>
-        </p:style>
-      </p:cxnSp>
-      <p:cxnSp>
-        <p:nvCxnSpPr>
-          <p:cNvPr id="98" name="Straight Arrow Connector 97">
-            <a:extLst>
-              <a:ext uri="{FF2B5EF4-FFF2-40B4-BE49-F238E27FC236}">
-                <a16:creationId xmlns:a16="http://schemas.microsoft.com/office/drawing/2014/main" id="{5C39DEFC-F70D-5BD7-0B0D-C69E9119A062}"/>
-              </a:ext>
-            </a:extLst>
-          </p:cNvPr>
-          <p:cNvCxnSpPr>
-            <a:stCxn id="11" idx="3"/>
-            <a:endCxn id="19" idx="0"/>
-          </p:cNvCxnSpPr>
-          <p:nvPr/>
-        </p:nvCxnSpPr>
-        <p:spPr>
-          <a:xfrm>
-            <a:off x="10857045" y="2673783"/>
-            <a:ext cx="529243" cy="8167"/>
-          </a:xfrm>
-          <a:prstGeom prst="straightConnector1">
-            <a:avLst/>
-          </a:prstGeom>
-          <a:ln>
-            <a:tailEnd type="triangle"/>
-          </a:ln>
-        </p:spPr>
-        <p:style>
-          <a:lnRef idx="1">
-            <a:schemeClr val="accent1"/>
-          </a:lnRef>
-          <a:fillRef idx="0">
-            <a:schemeClr val="accent1"/>
-          </a:fillRef>
-          <a:effectRef idx="0">
-            <a:schemeClr val="accent1"/>
-          </a:effectRef>
-          <a:fontRef idx="minor">
-            <a:schemeClr val="tx1"/>
-          </a:fontRef>
-        </p:style>
-      </p:cxnSp>
-      <p:sp>
-        <p:nvSpPr>
-          <p:cNvPr id="99" name="Rectangle: Rounded Corners 98">
-            <a:extLst>
-              <a:ext uri="{FF2B5EF4-FFF2-40B4-BE49-F238E27FC236}">
-                <a16:creationId xmlns:a16="http://schemas.microsoft.com/office/drawing/2014/main" id="{848EDA26-7438-F986-2FA0-BE6C2ADA496B}"/>
-              </a:ext>
-            </a:extLst>
-          </p:cNvPr>
-          <p:cNvSpPr/>
-          <p:nvPr/>
-        </p:nvSpPr>
-        <p:spPr>
-          <a:xfrm>
-            <a:off x="1623911" y="3669765"/>
-            <a:ext cx="401275" cy="283833"/>
-          </a:xfrm>
-          <a:prstGeom prst="roundRect">
-            <a:avLst/>
-          </a:prstGeom>
-          <a:solidFill>
-            <a:srgbClr val="FF0000"/>
-          </a:solidFill>
-        </p:spPr>
-        <p:style>
-          <a:lnRef idx="2">
-            <a:schemeClr val="accent2">
-              <a:shade val="15000"/>
-            </a:schemeClr>
-          </a:lnRef>
-          <a:fillRef idx="1">
-            <a:schemeClr val="accent2"/>
-          </a:fillRef>
-          <a:effectRef idx="0">
-            <a:schemeClr val="accent2"/>
-          </a:effectRef>
-          <a:fontRef idx="minor">
-            <a:schemeClr val="lt1"/>
-          </a:fontRef>
-        </p:style>
-        <p:txBody>
-          <a:bodyPr rtlCol="0" anchor="ctr"/>
-          <a:lstStyle/>
-          <a:p>
-            <a:pPr algn="ctr"/>
-            <a:r>
-              <a:rPr lang="es-CL" sz="1400" dirty="0"/>
-              <a:t>T5</a:t>
-            </a:r>
-            <a:endParaRPr lang="en-US" sz="1400" dirty="0"/>
-          </a:p>
-        </p:txBody>
-      </p:sp>
-      <p:sp>
-        <p:nvSpPr>
-          <p:cNvPr id="101" name="Rectangle: Rounded Corners 100">
-            <a:extLst>
-              <a:ext uri="{FF2B5EF4-FFF2-40B4-BE49-F238E27FC236}">
-                <a16:creationId xmlns:a16="http://schemas.microsoft.com/office/drawing/2014/main" id="{482719C1-F580-2F7E-014E-670ED7BA6667}"/>
-              </a:ext>
-            </a:extLst>
-          </p:cNvPr>
-          <p:cNvSpPr/>
-          <p:nvPr/>
-        </p:nvSpPr>
-        <p:spPr>
-          <a:xfrm>
-            <a:off x="8309760" y="2139221"/>
-            <a:ext cx="401275" cy="283833"/>
-          </a:xfrm>
-          <a:prstGeom prst="roundRect">
-            <a:avLst/>
-          </a:prstGeom>
-        </p:spPr>
-        <p:style>
-          <a:lnRef idx="2">
-            <a:schemeClr val="accent2">
-              <a:shade val="15000"/>
-            </a:schemeClr>
-          </a:lnRef>
-          <a:fillRef idx="1">
-            <a:schemeClr val="accent2"/>
-          </a:fillRef>
-          <a:effectRef idx="0">
-            <a:schemeClr val="accent2"/>
-          </a:effectRef>
-          <a:fontRef idx="minor">
-            <a:schemeClr val="lt1"/>
-          </a:fontRef>
-        </p:style>
-        <p:txBody>
-          <a:bodyPr rtlCol="0" anchor="ctr"/>
-          <a:lstStyle/>
-          <a:p>
-            <a:pPr algn="ctr"/>
-            <a:r>
-              <a:rPr lang="es-CL" sz="1400" dirty="0"/>
-              <a:t>T1</a:t>
-            </a:r>
-            <a:endParaRPr lang="en-US" sz="1400" dirty="0"/>
-          </a:p>
-        </p:txBody>
-      </p:sp>
-      <p:sp>
-        <p:nvSpPr>
-          <p:cNvPr id="102" name="Rectangle: Rounded Corners 101">
-            <a:extLst>
-              <a:ext uri="{FF2B5EF4-FFF2-40B4-BE49-F238E27FC236}">
-                <a16:creationId xmlns:a16="http://schemas.microsoft.com/office/drawing/2014/main" id="{02E8029B-3C67-6B56-5459-13AE87606506}"/>
-              </a:ext>
-            </a:extLst>
-          </p:cNvPr>
-          <p:cNvSpPr/>
-          <p:nvPr/>
-        </p:nvSpPr>
-        <p:spPr>
-          <a:xfrm>
-            <a:off x="10064285" y="3802828"/>
-            <a:ext cx="401275" cy="283833"/>
-          </a:xfrm>
-          <a:prstGeom prst="roundRect">
-            <a:avLst/>
-          </a:prstGeom>
-        </p:spPr>
-        <p:style>
-          <a:lnRef idx="2">
-            <a:schemeClr val="accent4">
-              <a:shade val="15000"/>
-            </a:schemeClr>
-          </a:lnRef>
-          <a:fillRef idx="1">
-            <a:schemeClr val="accent4"/>
-          </a:fillRef>
-          <a:effectRef idx="0">
-            <a:schemeClr val="accent4"/>
-          </a:effectRef>
-          <a:fontRef idx="minor">
-            <a:schemeClr val="lt1"/>
-          </a:fontRef>
-        </p:style>
-        <p:txBody>
-          <a:bodyPr rtlCol="0" anchor="ctr"/>
-          <a:lstStyle/>
-          <a:p>
-            <a:pPr algn="ctr"/>
-            <a:r>
-              <a:rPr lang="es-CL" sz="1400" dirty="0">
-                <a:ln w="0"/>
-                <a:solidFill>
-                  <a:schemeClr val="tx1"/>
-                </a:solidFill>
-                <a:effectLst>
-                  <a:outerShdw blurRad="38100" dist="19050" dir="2700000" algn="tl" rotWithShape="0">
-                    <a:schemeClr val="dk1">
-                      <a:alpha val="40000"/>
-                    </a:schemeClr>
-                  </a:outerShdw>
-                </a:effectLst>
-              </a:rPr>
-              <a:t>T3</a:t>
-            </a:r>
-            <a:endParaRPr lang="en-US" sz="1400" dirty="0">
-              <a:ln w="0"/>
-              <a:solidFill>
-                <a:schemeClr val="tx1"/>
-              </a:solidFill>
-              <a:effectLst>
-                <a:outerShdw blurRad="38100" dist="19050" dir="2700000" algn="tl" rotWithShape="0">
-                  <a:schemeClr val="dk1">
-                    <a:alpha val="40000"/>
-                  </a:schemeClr>
-                </a:outerShdw>
-              </a:effectLst>
-            </a:endParaRPr>
-          </a:p>
-        </p:txBody>
-      </p:sp>
-      <p:sp>
-        <p:nvSpPr>
-          <p:cNvPr id="104" name="Rectangle: Rounded Corners 103">
-            <a:extLst>
-              <a:ext uri="{FF2B5EF4-FFF2-40B4-BE49-F238E27FC236}">
-                <a16:creationId xmlns:a16="http://schemas.microsoft.com/office/drawing/2014/main" id="{17924FF3-D608-47B5-C137-90D13770817A}"/>
-              </a:ext>
-            </a:extLst>
-          </p:cNvPr>
-          <p:cNvSpPr/>
-          <p:nvPr/>
-        </p:nvSpPr>
-        <p:spPr>
-          <a:xfrm>
-            <a:off x="10519753" y="2129298"/>
-            <a:ext cx="401275" cy="283833"/>
-          </a:xfrm>
-          <a:prstGeom prst="roundRect">
-            <a:avLst/>
-          </a:prstGeom>
-          <a:solidFill>
-            <a:srgbClr val="00B0F0"/>
-          </a:solidFill>
-        </p:spPr>
-        <p:style>
-          <a:lnRef idx="2">
-            <a:schemeClr val="accent2">
-              <a:shade val="15000"/>
-            </a:schemeClr>
-          </a:lnRef>
-          <a:fillRef idx="1">
-            <a:schemeClr val="accent2"/>
-          </a:fillRef>
-          <a:effectRef idx="0">
-            <a:schemeClr val="accent2"/>
-          </a:effectRef>
-          <a:fontRef idx="minor">
-            <a:schemeClr val="lt1"/>
-          </a:fontRef>
-        </p:style>
-        <p:txBody>
-          <a:bodyPr rtlCol="0" anchor="ctr"/>
-          <a:lstStyle/>
-          <a:p>
-            <a:pPr algn="ctr"/>
-            <a:r>
-              <a:rPr lang="es-CL" sz="1400" dirty="0"/>
-              <a:t>T4</a:t>
-            </a:r>
-            <a:endParaRPr lang="en-US" sz="1400" dirty="0"/>
-          </a:p>
-        </p:txBody>
-      </p:sp>
-      <p:cxnSp>
-        <p:nvCxnSpPr>
-          <p:cNvPr id="108" name="Straight Connector 107">
-            <a:extLst>
-              <a:ext uri="{FF2B5EF4-FFF2-40B4-BE49-F238E27FC236}">
-                <a16:creationId xmlns:a16="http://schemas.microsoft.com/office/drawing/2014/main" id="{BCE83E19-7A96-ECA5-FBD8-2A07BAFA416E}"/>
-              </a:ext>
-            </a:extLst>
-          </p:cNvPr>
-          <p:cNvCxnSpPr/>
-          <p:nvPr/>
-        </p:nvCxnSpPr>
-        <p:spPr>
-          <a:xfrm>
-            <a:off x="90684" y="3264635"/>
-            <a:ext cx="11970328" cy="0"/>
-          </a:xfrm>
-          <a:prstGeom prst="line">
-            <a:avLst/>
-          </a:prstGeom>
-          <a:ln w="19050" cap="flat" cmpd="sng" algn="ctr">
-            <a:solidFill>
-              <a:schemeClr val="dk1"/>
-            </a:solidFill>
-            <a:prstDash val="dash"/>
-            <a:round/>
-            <a:headEnd type="none" w="med" len="med"/>
-            <a:tailEnd type="none" w="med" len="med"/>
-          </a:ln>
-        </p:spPr>
-        <p:style>
-          <a:lnRef idx="0">
-            <a:scrgbClr r="0" g="0" b="0"/>
-          </a:lnRef>
-          <a:fillRef idx="0">
-            <a:scrgbClr r="0" g="0" b="0"/>
-          </a:fillRef>
-          <a:effectRef idx="0">
-            <a:scrgbClr r="0" g="0" b="0"/>
-          </a:effectRef>
-          <a:fontRef idx="minor">
-            <a:schemeClr val="tx1"/>
-          </a:fontRef>
-        </p:style>
-      </p:cxnSp>
-      <p:sp>
-        <p:nvSpPr>
-          <p:cNvPr id="110" name="TextBox 109">
-            <a:extLst>
-              <a:ext uri="{FF2B5EF4-FFF2-40B4-BE49-F238E27FC236}">
-                <a16:creationId xmlns:a16="http://schemas.microsoft.com/office/drawing/2014/main" id="{131A2928-AA6E-09F0-AE7F-CB4E0DE12E36}"/>
-              </a:ext>
-            </a:extLst>
-          </p:cNvPr>
-          <p:cNvSpPr txBox="1"/>
-          <p:nvPr/>
-        </p:nvSpPr>
-        <p:spPr>
-          <a:xfrm>
-            <a:off x="10064285" y="773317"/>
-            <a:ext cx="958852" cy="369332"/>
-          </a:xfrm>
-          <a:prstGeom prst="rect">
-            <a:avLst/>
-          </a:prstGeom>
-          <a:noFill/>
-        </p:spPr>
-        <p:txBody>
-          <a:bodyPr wrap="none" rtlCol="0">
-            <a:spAutoFit/>
-          </a:bodyPr>
-          <a:lstStyle/>
-          <a:p>
-            <a:r>
-              <a:rPr lang="en-US" dirty="0"/>
-              <a:t>PLACA 1</a:t>
-            </a:r>
-          </a:p>
-        </p:txBody>
-      </p:sp>
-      <p:sp>
-        <p:nvSpPr>
-          <p:cNvPr id="112" name="TextBox 111">
-            <a:extLst>
-              <a:ext uri="{FF2B5EF4-FFF2-40B4-BE49-F238E27FC236}">
-                <a16:creationId xmlns:a16="http://schemas.microsoft.com/office/drawing/2014/main" id="{0E3484ED-906E-6940-DB2B-D8EDA0B50B2D}"/>
-              </a:ext>
-            </a:extLst>
-          </p:cNvPr>
-          <p:cNvSpPr txBox="1"/>
-          <p:nvPr/>
-        </p:nvSpPr>
-        <p:spPr>
-          <a:xfrm>
-            <a:off x="4086830" y="5962493"/>
-            <a:ext cx="958852" cy="369332"/>
-          </a:xfrm>
-          <a:prstGeom prst="rect">
-            <a:avLst/>
-          </a:prstGeom>
-          <a:noFill/>
-        </p:spPr>
-        <p:txBody>
-          <a:bodyPr wrap="none" rtlCol="0">
-            <a:spAutoFit/>
-          </a:bodyPr>
-          <a:lstStyle/>
-          <a:p>
-            <a:r>
-              <a:rPr lang="en-US" dirty="0"/>
-              <a:t>PLACA 2</a:t>
-            </a:r>
-          </a:p>
-        </p:txBody>
-      </p:sp>
-      <p:sp>
-        <p:nvSpPr>
-          <p:cNvPr id="115" name="Rectangle: Rounded Corners 114">
-            <a:extLst>
-              <a:ext uri="{FF2B5EF4-FFF2-40B4-BE49-F238E27FC236}">
-                <a16:creationId xmlns:a16="http://schemas.microsoft.com/office/drawing/2014/main" id="{1FD20DC2-D23C-444C-1446-3ECE976D35D5}"/>
-              </a:ext>
-            </a:extLst>
-          </p:cNvPr>
-          <p:cNvSpPr/>
-          <p:nvPr/>
-        </p:nvSpPr>
-        <p:spPr>
-          <a:xfrm>
-            <a:off x="11764677" y="3855487"/>
-            <a:ext cx="401275" cy="283833"/>
-          </a:xfrm>
-          <a:prstGeom prst="roundRect">
-            <a:avLst/>
-          </a:prstGeom>
-          <a:solidFill>
-            <a:srgbClr val="FF0000"/>
-          </a:solidFill>
-        </p:spPr>
-        <p:style>
-          <a:lnRef idx="2">
-            <a:schemeClr val="accent2">
-              <a:shade val="15000"/>
-            </a:schemeClr>
-          </a:lnRef>
-          <a:fillRef idx="1">
-            <a:schemeClr val="accent2"/>
-          </a:fillRef>
-          <a:effectRef idx="0">
-            <a:schemeClr val="accent2"/>
-          </a:effectRef>
-          <a:fontRef idx="minor">
-            <a:schemeClr val="lt1"/>
-          </a:fontRef>
-        </p:style>
-        <p:txBody>
-          <a:bodyPr rtlCol="0" anchor="ctr"/>
-          <a:lstStyle/>
-          <a:p>
-            <a:pPr algn="ctr"/>
-            <a:r>
-              <a:rPr lang="es-CL" sz="1400" dirty="0"/>
-              <a:t>T5</a:t>
-            </a:r>
-            <a:endParaRPr lang="en-US" sz="1400" dirty="0"/>
-          </a:p>
-        </p:txBody>
-      </p:sp>
-      <p:sp>
-        <p:nvSpPr>
-          <p:cNvPr id="117" name="Rectangle: Rounded Corners 116">
-            <a:extLst>
-              <a:ext uri="{FF2B5EF4-FFF2-40B4-BE49-F238E27FC236}">
-                <a16:creationId xmlns:a16="http://schemas.microsoft.com/office/drawing/2014/main" id="{0196D20E-1BAF-08FD-62C1-C75CCD425091}"/>
-              </a:ext>
-            </a:extLst>
-          </p:cNvPr>
-          <p:cNvSpPr/>
-          <p:nvPr/>
-        </p:nvSpPr>
-        <p:spPr>
-          <a:xfrm>
-            <a:off x="1803975" y="520587"/>
+            <a:off x="1846758" y="1798821"/>
             <a:ext cx="401275" cy="283833"/>
           </a:xfrm>
           <a:prstGeom prst="roundRect">
@@ -6108,80 +5647,260 @@
           </a:p>
         </p:txBody>
       </p:sp>
-      <p:sp>
-        <p:nvSpPr>
-          <p:cNvPr id="2" name="Rectangle: Rounded Corners 1">
-            <a:extLst>
-              <a:ext uri="{FF2B5EF4-FFF2-40B4-BE49-F238E27FC236}">
-                <a16:creationId xmlns:a16="http://schemas.microsoft.com/office/drawing/2014/main" id="{5D8493F2-CCC5-7CF8-2810-A32A53F5E76E}"/>
-              </a:ext>
-            </a:extLst>
-          </p:cNvPr>
-          <p:cNvSpPr/>
+      <p:cxnSp>
+        <p:nvCxnSpPr>
+          <p:cNvPr id="111" name="Straight Arrow Connector 110">
+            <a:extLst>
+              <a:ext uri="{FF2B5EF4-FFF2-40B4-BE49-F238E27FC236}">
+                <a16:creationId xmlns:a16="http://schemas.microsoft.com/office/drawing/2014/main" id="{F016C4EB-D617-E825-3599-39E19F9826E0}"/>
+              </a:ext>
+            </a:extLst>
+          </p:cNvPr>
+          <p:cNvCxnSpPr>
+            <a:cxnSpLocks/>
+            <a:stCxn id="103" idx="2"/>
+            <a:endCxn id="97" idx="0"/>
+          </p:cNvCxnSpPr>
           <p:nvPr/>
-        </p:nvSpPr>
-        <p:spPr>
-          <a:xfrm>
-            <a:off x="1257144" y="2135713"/>
-            <a:ext cx="401275" cy="283833"/>
-          </a:xfrm>
-          <a:prstGeom prst="roundRect">
+        </p:nvCxnSpPr>
+        <p:spPr>
+          <a:xfrm>
+            <a:off x="1322275" y="1575192"/>
+            <a:ext cx="4881" cy="299229"/>
+          </a:xfrm>
+          <a:prstGeom prst="straightConnector1">
             <a:avLst/>
           </a:prstGeom>
+          <a:ln>
+            <a:tailEnd type="triangle"/>
+          </a:ln>
         </p:spPr>
         <p:style>
-          <a:lnRef idx="2">
-            <a:schemeClr val="accent4">
-              <a:shade val="15000"/>
-            </a:schemeClr>
+          <a:lnRef idx="1">
+            <a:schemeClr val="accent1"/>
           </a:lnRef>
-          <a:fillRef idx="1">
-            <a:schemeClr val="accent4"/>
+          <a:fillRef idx="0">
+            <a:schemeClr val="accent1"/>
           </a:fillRef>
           <a:effectRef idx="0">
-            <a:schemeClr val="accent4"/>
+            <a:schemeClr val="accent1"/>
           </a:effectRef>
           <a:fontRef idx="minor">
-            <a:schemeClr val="lt1"/>
+            <a:schemeClr val="tx1"/>
           </a:fontRef>
         </p:style>
-        <p:txBody>
-          <a:bodyPr rtlCol="0" anchor="ctr"/>
-          <a:lstStyle/>
-          <a:p>
-            <a:pPr algn="ctr"/>
-            <a:r>
-              <a:rPr lang="es-CL" sz="1400" dirty="0">
-                <a:ln w="0"/>
-                <a:solidFill>
-                  <a:schemeClr val="tx1"/>
-                </a:solidFill>
-                <a:effectLst>
-                  <a:outerShdw blurRad="38100" dist="19050" dir="2700000" algn="tl" rotWithShape="0">
-                    <a:schemeClr val="dk1">
-                      <a:alpha val="40000"/>
-                    </a:schemeClr>
-                  </a:outerShdw>
-                </a:effectLst>
-              </a:rPr>
-              <a:t>T3</a:t>
-            </a:r>
-            <a:endParaRPr lang="en-US" sz="1400" dirty="0">
-              <a:ln w="0"/>
-              <a:solidFill>
-                <a:schemeClr val="tx1"/>
-              </a:solidFill>
-              <a:effectLst>
-                <a:outerShdw blurRad="38100" dist="19050" dir="2700000" algn="tl" rotWithShape="0">
-                  <a:schemeClr val="dk1">
-                    <a:alpha val="40000"/>
-                  </a:schemeClr>
-                </a:outerShdw>
-              </a:effectLst>
-            </a:endParaRPr>
-          </a:p>
-        </p:txBody>
-      </p:sp>
+      </p:cxnSp>
+      <p:cxnSp>
+        <p:nvCxnSpPr>
+          <p:cNvPr id="113" name="Straight Arrow Connector 112">
+            <a:extLst>
+              <a:ext uri="{FF2B5EF4-FFF2-40B4-BE49-F238E27FC236}">
+                <a16:creationId xmlns:a16="http://schemas.microsoft.com/office/drawing/2014/main" id="{199B1A81-6367-ED6F-3619-AA00D7F30272}"/>
+              </a:ext>
+            </a:extLst>
+          </p:cNvPr>
+          <p:cNvCxnSpPr>
+            <a:cxnSpLocks/>
+            <a:stCxn id="97" idx="2"/>
+            <a:endCxn id="100" idx="0"/>
+          </p:cNvCxnSpPr>
+          <p:nvPr/>
+        </p:nvCxnSpPr>
+        <p:spPr>
+          <a:xfrm flipH="1">
+            <a:off x="1322276" y="2646208"/>
+            <a:ext cx="4880" cy="207808"/>
+          </a:xfrm>
+          <a:prstGeom prst="straightConnector1">
+            <a:avLst/>
+          </a:prstGeom>
+          <a:ln>
+            <a:tailEnd type="triangle"/>
+          </a:ln>
+        </p:spPr>
+        <p:style>
+          <a:lnRef idx="1">
+            <a:schemeClr val="accent1"/>
+          </a:lnRef>
+          <a:fillRef idx="0">
+            <a:schemeClr val="accent1"/>
+          </a:fillRef>
+          <a:effectRef idx="0">
+            <a:schemeClr val="accent1"/>
+          </a:effectRef>
+          <a:fontRef idx="minor">
+            <a:schemeClr val="tx1"/>
+          </a:fontRef>
+        </p:style>
+      </p:cxnSp>
+      <p:cxnSp>
+        <p:nvCxnSpPr>
+          <p:cNvPr id="114" name="Straight Arrow Connector 113">
+            <a:extLst>
+              <a:ext uri="{FF2B5EF4-FFF2-40B4-BE49-F238E27FC236}">
+                <a16:creationId xmlns:a16="http://schemas.microsoft.com/office/drawing/2014/main" id="{D9EA6E8C-DADB-F24F-0296-A9B51539B357}"/>
+              </a:ext>
+            </a:extLst>
+          </p:cNvPr>
+          <p:cNvCxnSpPr>
+            <a:cxnSpLocks/>
+            <a:stCxn id="100" idx="2"/>
+            <a:endCxn id="105" idx="0"/>
+          </p:cNvCxnSpPr>
+          <p:nvPr/>
+        </p:nvCxnSpPr>
+        <p:spPr>
+          <a:xfrm>
+            <a:off x="1322276" y="3625803"/>
+            <a:ext cx="4880" cy="285146"/>
+          </a:xfrm>
+          <a:prstGeom prst="straightConnector1">
+            <a:avLst/>
+          </a:prstGeom>
+          <a:ln>
+            <a:tailEnd type="triangle"/>
+          </a:ln>
+        </p:spPr>
+        <p:style>
+          <a:lnRef idx="1">
+            <a:schemeClr val="accent1"/>
+          </a:lnRef>
+          <a:fillRef idx="0">
+            <a:schemeClr val="accent1"/>
+          </a:fillRef>
+          <a:effectRef idx="0">
+            <a:schemeClr val="accent1"/>
+          </a:effectRef>
+          <a:fontRef idx="minor">
+            <a:schemeClr val="tx1"/>
+          </a:fontRef>
+        </p:style>
+      </p:cxnSp>
+      <p:cxnSp>
+        <p:nvCxnSpPr>
+          <p:cNvPr id="118" name="Connector: Elbow 117">
+            <a:extLst>
+              <a:ext uri="{FF2B5EF4-FFF2-40B4-BE49-F238E27FC236}">
+                <a16:creationId xmlns:a16="http://schemas.microsoft.com/office/drawing/2014/main" id="{356F3949-7540-6758-1B0E-CFC3224DF66E}"/>
+              </a:ext>
+            </a:extLst>
+          </p:cNvPr>
+          <p:cNvCxnSpPr>
+            <a:stCxn id="79" idx="3"/>
+            <a:endCxn id="34" idx="1"/>
+          </p:cNvCxnSpPr>
+          <p:nvPr/>
+        </p:nvCxnSpPr>
+        <p:spPr>
+          <a:xfrm flipV="1">
+            <a:off x="4920211" y="3643552"/>
+            <a:ext cx="674908" cy="668138"/>
+          </a:xfrm>
+          <a:prstGeom prst="bentConnector3">
+            <a:avLst>
+              <a:gd name="adj1" fmla="val 38940"/>
+            </a:avLst>
+          </a:prstGeom>
+          <a:ln>
+            <a:tailEnd type="triangle"/>
+          </a:ln>
+        </p:spPr>
+        <p:style>
+          <a:lnRef idx="1">
+            <a:schemeClr val="accent1"/>
+          </a:lnRef>
+          <a:fillRef idx="0">
+            <a:schemeClr val="accent1"/>
+          </a:fillRef>
+          <a:effectRef idx="0">
+            <a:schemeClr val="accent1"/>
+          </a:effectRef>
+          <a:fontRef idx="minor">
+            <a:schemeClr val="tx1"/>
+          </a:fontRef>
+        </p:style>
+      </p:cxnSp>
+      <p:cxnSp>
+        <p:nvCxnSpPr>
+          <p:cNvPr id="126" name="Connector: Elbow 125">
+            <a:extLst>
+              <a:ext uri="{FF2B5EF4-FFF2-40B4-BE49-F238E27FC236}">
+                <a16:creationId xmlns:a16="http://schemas.microsoft.com/office/drawing/2014/main" id="{99B98158-2575-84CF-F1A8-001E4B1E9660}"/>
+              </a:ext>
+            </a:extLst>
+          </p:cNvPr>
+          <p:cNvCxnSpPr>
+            <a:stCxn id="105" idx="3"/>
+          </p:cNvCxnSpPr>
+          <p:nvPr/>
+        </p:nvCxnSpPr>
+        <p:spPr>
+          <a:xfrm>
+            <a:off x="2119915" y="4296843"/>
+            <a:ext cx="1209896" cy="527084"/>
+          </a:xfrm>
+          <a:prstGeom prst="bentConnector3">
+            <a:avLst/>
+          </a:prstGeom>
+        </p:spPr>
+        <p:style>
+          <a:lnRef idx="1">
+            <a:schemeClr val="accent1"/>
+          </a:lnRef>
+          <a:fillRef idx="0">
+            <a:schemeClr val="accent1"/>
+          </a:fillRef>
+          <a:effectRef idx="0">
+            <a:schemeClr val="accent1"/>
+          </a:effectRef>
+          <a:fontRef idx="minor">
+            <a:schemeClr val="tx1"/>
+          </a:fontRef>
+        </p:style>
+      </p:cxnSp>
+      <p:cxnSp>
+        <p:nvCxnSpPr>
+          <p:cNvPr id="128" name="Connector: Elbow 127">
+            <a:extLst>
+              <a:ext uri="{FF2B5EF4-FFF2-40B4-BE49-F238E27FC236}">
+                <a16:creationId xmlns:a16="http://schemas.microsoft.com/office/drawing/2014/main" id="{F7871938-AF76-BCA7-6F65-3D7035BEB5B8}"/>
+              </a:ext>
+            </a:extLst>
+          </p:cNvPr>
+          <p:cNvCxnSpPr>
+            <a:cxnSpLocks/>
+          </p:cNvCxnSpPr>
+          <p:nvPr/>
+        </p:nvCxnSpPr>
+        <p:spPr>
+          <a:xfrm flipV="1">
+            <a:off x="3329811" y="3857336"/>
+            <a:ext cx="2265308" cy="966591"/>
+          </a:xfrm>
+          <a:prstGeom prst="bentConnector3">
+            <a:avLst>
+              <a:gd name="adj1" fmla="val 91189"/>
+            </a:avLst>
+          </a:prstGeom>
+          <a:ln>
+            <a:tailEnd type="triangle"/>
+          </a:ln>
+        </p:spPr>
+        <p:style>
+          <a:lnRef idx="1">
+            <a:schemeClr val="accent1"/>
+          </a:lnRef>
+          <a:fillRef idx="0">
+            <a:schemeClr val="accent1"/>
+          </a:fillRef>
+          <a:effectRef idx="0">
+            <a:schemeClr val="accent1"/>
+          </a:effectRef>
+          <a:fontRef idx="minor">
+            <a:schemeClr val="tx1"/>
+          </a:fontRef>
+        </p:style>
+      </p:cxnSp>
     </p:spTree>
     <p:extLst>
       <p:ext uri="{BB962C8B-B14F-4D97-AF65-F5344CB8AC3E}">
